--- a/квиз 1с-эпд/Квиз_1С-ЭПД_Доки_Логистика_100к1.pptx
+++ b/квиз 1с-эпд/Квиз_1С-ЭПД_Доки_Логистика_100к1.pptx
@@ -12493,7 +12493,7 @@
                 <a:ea typeface="Verdana"/>
                 <a:cs typeface="Verdana"/>
               </a:rPr>
-              <a:t>Клик по баллам → вопрос  ·  таймер 30 сек  ·  ответ откроется сам  ·  «К полю» — назад</a:t>
+              <a:t>Клик по баллам → вопрос  ·  открытые ячейки краснеют  ·  таймер 30 сек  ·  «К полю» — назад</a:t>
             </a:r>
           </a:p>
         </p:txBody>
@@ -12892,7 +12892,7 @@
       </p:sp>
       <p:sp>
         <p:nvSpPr>
-          <p:cNvPr id="12" name="Rounded Rectangle 11">
+          <p:cNvPr id="12" name="Cell_0_0">
             <a:hlinkClick action="ppaction://hlinksldjump" r:id="rId2"/>
           </p:cNvPr>
           <p:cNvSpPr/>
@@ -12906,6 +12906,299 @@
           <a:prstGeom prst="roundRect">
             <a:avLst>
               <a:gd name="adj" fmla="val 12000"/>
+            </a:avLst>
+          </a:prstGeom>
+          <a:solidFill>
+            <a:srgbClr val="26A6E0"/>
+          </a:solidFill>
+          <a:ln>
+            <a:noFill/>
+          </a:ln>
+        </p:spPr>
+        <p:style>
+          <a:lnRef idx="1">
+            <a:schemeClr val="accent1"/>
+          </a:lnRef>
+          <a:fillRef idx="3">
+            <a:schemeClr val="accent1"/>
+          </a:fillRef>
+          <a:effectRef idx="2">
+            <a:schemeClr val="accent1"/>
+          </a:effectRef>
+          <a:fontRef idx="minor">
+            <a:schemeClr val="lt1"/>
+          </a:fontRef>
+        </p:style>
+        <p:txBody>
+          <a:bodyPr rtlCol="0" anchor="ctr" wrap="square"/>
+          <a:lstStyle/>
+          <a:p>
+            <a:pPr algn="ctr"/>
+            <a:r>
+              <a:rPr sz="2200" b="1">
+                <a:latin typeface="Verdana"/>
+                <a:ea typeface="Verdana"/>
+                <a:cs typeface="Verdana"/>
+                <a:solidFill>
+                  <a:schemeClr val="hlink"/>
+                </a:solidFill>
+                <a:hlinkClick r:id="rId2" action="ppaction://hlinksldjump"/>
+              </a:rPr>
+              <a:t>10</a:t>
+            </a:r>
+          </a:p>
+        </p:txBody>
+      </p:sp>
+      <p:sp>
+        <p:nvSpPr>
+          <p:cNvPr id="13" name="Cell_0_1">
+            <a:hlinkClick action="ppaction://hlinksldjump" r:id="rId3"/>
+          </p:cNvPr>
+          <p:cNvSpPr/>
+          <p:nvPr/>
+        </p:nvSpPr>
+        <p:spPr>
+          <a:xfrm>
+            <a:off x="4745736" y="2441448"/>
+            <a:ext cx="1554480" cy="777240"/>
+          </a:xfrm>
+          <a:prstGeom prst="roundRect">
+            <a:avLst>
+              <a:gd name="adj" fmla="val 12000"/>
+            </a:avLst>
+          </a:prstGeom>
+          <a:solidFill>
+            <a:srgbClr val="26A6E0"/>
+          </a:solidFill>
+          <a:ln>
+            <a:noFill/>
+          </a:ln>
+        </p:spPr>
+        <p:style>
+          <a:lnRef idx="1">
+            <a:schemeClr val="accent1"/>
+          </a:lnRef>
+          <a:fillRef idx="3">
+            <a:schemeClr val="accent1"/>
+          </a:fillRef>
+          <a:effectRef idx="2">
+            <a:schemeClr val="accent1"/>
+          </a:effectRef>
+          <a:fontRef idx="minor">
+            <a:schemeClr val="lt1"/>
+          </a:fontRef>
+        </p:style>
+        <p:txBody>
+          <a:bodyPr rtlCol="0" anchor="ctr" wrap="square"/>
+          <a:lstStyle/>
+          <a:p>
+            <a:pPr algn="ctr"/>
+            <a:r>
+              <a:rPr sz="2200" b="1">
+                <a:latin typeface="Verdana"/>
+                <a:ea typeface="Verdana"/>
+                <a:cs typeface="Verdana"/>
+                <a:solidFill>
+                  <a:schemeClr val="hlink"/>
+                </a:solidFill>
+                <a:hlinkClick r:id="rId3" action="ppaction://hlinksldjump"/>
+              </a:rPr>
+              <a:t>30</a:t>
+            </a:r>
+          </a:p>
+        </p:txBody>
+      </p:sp>
+      <p:sp>
+        <p:nvSpPr>
+          <p:cNvPr id="14" name="Cell_0_2">
+            <a:hlinkClick action="ppaction://hlinksldjump" r:id="rId4"/>
+          </p:cNvPr>
+          <p:cNvSpPr/>
+          <p:nvPr/>
+        </p:nvSpPr>
+        <p:spPr>
+          <a:xfrm>
+            <a:off x="6409944" y="2441448"/>
+            <a:ext cx="1554480" cy="777240"/>
+          </a:xfrm>
+          <a:prstGeom prst="roundRect">
+            <a:avLst>
+              <a:gd name="adj" fmla="val 12000"/>
+            </a:avLst>
+          </a:prstGeom>
+          <a:solidFill>
+            <a:srgbClr val="26A6E0"/>
+          </a:solidFill>
+          <a:ln>
+            <a:noFill/>
+          </a:ln>
+        </p:spPr>
+        <p:style>
+          <a:lnRef idx="1">
+            <a:schemeClr val="accent1"/>
+          </a:lnRef>
+          <a:fillRef idx="3">
+            <a:schemeClr val="accent1"/>
+          </a:fillRef>
+          <a:effectRef idx="2">
+            <a:schemeClr val="accent1"/>
+          </a:effectRef>
+          <a:fontRef idx="minor">
+            <a:schemeClr val="lt1"/>
+          </a:fontRef>
+        </p:style>
+        <p:txBody>
+          <a:bodyPr rtlCol="0" anchor="ctr" wrap="square"/>
+          <a:lstStyle/>
+          <a:p>
+            <a:pPr algn="ctr"/>
+            <a:r>
+              <a:rPr sz="2200" b="1">
+                <a:latin typeface="Verdana"/>
+                <a:ea typeface="Verdana"/>
+                <a:cs typeface="Verdana"/>
+                <a:solidFill>
+                  <a:schemeClr val="hlink"/>
+                </a:solidFill>
+                <a:hlinkClick r:id="rId4" action="ppaction://hlinksldjump"/>
+              </a:rPr>
+              <a:t>50</a:t>
+            </a:r>
+          </a:p>
+        </p:txBody>
+      </p:sp>
+      <p:sp>
+        <p:nvSpPr>
+          <p:cNvPr id="15" name="Cell_0_3">
+            <a:hlinkClick action="ppaction://hlinksldjump" r:id="rId5"/>
+          </p:cNvPr>
+          <p:cNvSpPr/>
+          <p:nvPr/>
+        </p:nvSpPr>
+        <p:spPr>
+          <a:xfrm>
+            <a:off x="8074152" y="2441448"/>
+            <a:ext cx="1554480" cy="777240"/>
+          </a:xfrm>
+          <a:prstGeom prst="roundRect">
+            <a:avLst>
+              <a:gd name="adj" fmla="val 12000"/>
+            </a:avLst>
+          </a:prstGeom>
+          <a:solidFill>
+            <a:srgbClr val="26A6E0"/>
+          </a:solidFill>
+          <a:ln>
+            <a:noFill/>
+          </a:ln>
+        </p:spPr>
+        <p:style>
+          <a:lnRef idx="1">
+            <a:schemeClr val="accent1"/>
+          </a:lnRef>
+          <a:fillRef idx="3">
+            <a:schemeClr val="accent1"/>
+          </a:fillRef>
+          <a:effectRef idx="2">
+            <a:schemeClr val="accent1"/>
+          </a:effectRef>
+          <a:fontRef idx="minor">
+            <a:schemeClr val="lt1"/>
+          </a:fontRef>
+        </p:style>
+        <p:txBody>
+          <a:bodyPr rtlCol="0" anchor="ctr" wrap="square"/>
+          <a:lstStyle/>
+          <a:p>
+            <a:pPr algn="ctr"/>
+            <a:r>
+              <a:rPr sz="2200" b="1">
+                <a:latin typeface="Verdana"/>
+                <a:ea typeface="Verdana"/>
+                <a:cs typeface="Verdana"/>
+                <a:solidFill>
+                  <a:schemeClr val="hlink"/>
+                </a:solidFill>
+                <a:hlinkClick r:id="rId5" action="ppaction://hlinksldjump"/>
+              </a:rPr>
+              <a:t>70</a:t>
+            </a:r>
+          </a:p>
+        </p:txBody>
+      </p:sp>
+      <p:sp>
+        <p:nvSpPr>
+          <p:cNvPr id="16" name="Cell_0_4">
+            <a:hlinkClick action="ppaction://hlinksldjump" r:id="rId6"/>
+          </p:cNvPr>
+          <p:cNvSpPr/>
+          <p:nvPr/>
+        </p:nvSpPr>
+        <p:spPr>
+          <a:xfrm>
+            <a:off x="9738360" y="2441448"/>
+            <a:ext cx="1554480" cy="777240"/>
+          </a:xfrm>
+          <a:prstGeom prst="roundRect">
+            <a:avLst>
+              <a:gd name="adj" fmla="val 12000"/>
+            </a:avLst>
+          </a:prstGeom>
+          <a:solidFill>
+            <a:srgbClr val="F0B42E"/>
+          </a:solidFill>
+          <a:ln>
+            <a:noFill/>
+          </a:ln>
+        </p:spPr>
+        <p:style>
+          <a:lnRef idx="1">
+            <a:schemeClr val="accent1"/>
+          </a:lnRef>
+          <a:fillRef idx="3">
+            <a:schemeClr val="accent1"/>
+          </a:fillRef>
+          <a:effectRef idx="2">
+            <a:schemeClr val="accent1"/>
+          </a:effectRef>
+          <a:fontRef idx="minor">
+            <a:schemeClr val="lt1"/>
+          </a:fontRef>
+        </p:style>
+        <p:txBody>
+          <a:bodyPr rtlCol="0" anchor="ctr" wrap="square"/>
+          <a:lstStyle/>
+          <a:p>
+            <a:pPr algn="ctr"/>
+            <a:r>
+              <a:rPr sz="2200" b="1">
+                <a:latin typeface="Verdana"/>
+                <a:ea typeface="Verdana"/>
+                <a:cs typeface="Verdana"/>
+                <a:solidFill>
+                  <a:schemeClr val="hlink"/>
+                </a:solidFill>
+                <a:hlinkClick r:id="rId6" action="ppaction://hlinksldjump"/>
+              </a:rPr>
+              <a:t>100</a:t>
+            </a:r>
+          </a:p>
+        </p:txBody>
+      </p:sp>
+      <p:sp>
+        <p:nvSpPr>
+          <p:cNvPr id="17" name="Rounded Rectangle 16"/>
+          <p:cNvSpPr/>
+          <p:nvPr/>
+        </p:nvSpPr>
+        <p:spPr>
+          <a:xfrm>
+            <a:off x="640080" y="3328416"/>
+            <a:ext cx="2331720" cy="777240"/>
+          </a:xfrm>
+          <a:prstGeom prst="roundRect">
+            <a:avLst>
+              <a:gd name="adj" fmla="val 8000"/>
             </a:avLst>
           </a:prstGeom>
           <a:solidFill>
@@ -12935,7 +13228,7 @@
           <a:p>
             <a:pPr algn="ctr"/>
             <a:r>
-              <a:rPr sz="2000" b="1">
+              <a:rPr sz="1200" b="1">
                 <a:solidFill>
                   <a:srgbClr val="FFFFFF"/>
                 </a:solidFill>
@@ -12943,27 +13236,320 @@
                 <a:ea typeface="Verdana"/>
                 <a:cs typeface="Verdana"/>
               </a:rPr>
-              <a:t>10</a:t>
-            </a:r>
-          </a:p>
-        </p:txBody>
-      </p:sp>
-      <p:sp>
-        <p:nvSpPr>
-          <p:cNvPr id="13" name="Rounded Rectangle 12">
-            <a:hlinkClick action="ppaction://hlinksldjump" r:id="rId3"/>
+              <a:t>ЭТрН и обязательность</a:t>
+            </a:r>
+          </a:p>
+        </p:txBody>
+      </p:sp>
+      <p:sp>
+        <p:nvSpPr>
+          <p:cNvPr id="18" name="Cell_1_0">
+            <a:hlinkClick action="ppaction://hlinksldjump" r:id="rId7"/>
           </p:cNvPr>
           <p:cNvSpPr/>
           <p:nvPr/>
         </p:nvSpPr>
         <p:spPr>
           <a:xfrm>
-            <a:off x="4745736" y="2441448"/>
+            <a:off x="3081528" y="3328416"/>
             <a:ext cx="1554480" cy="777240"/>
           </a:xfrm>
           <a:prstGeom prst="roundRect">
             <a:avLst>
               <a:gd name="adj" fmla="val 12000"/>
+            </a:avLst>
+          </a:prstGeom>
+          <a:solidFill>
+            <a:srgbClr val="26A6E0"/>
+          </a:solidFill>
+          <a:ln>
+            <a:noFill/>
+          </a:ln>
+        </p:spPr>
+        <p:style>
+          <a:lnRef idx="1">
+            <a:schemeClr val="accent1"/>
+          </a:lnRef>
+          <a:fillRef idx="3">
+            <a:schemeClr val="accent1"/>
+          </a:fillRef>
+          <a:effectRef idx="2">
+            <a:schemeClr val="accent1"/>
+          </a:effectRef>
+          <a:fontRef idx="minor">
+            <a:schemeClr val="lt1"/>
+          </a:fontRef>
+        </p:style>
+        <p:txBody>
+          <a:bodyPr rtlCol="0" anchor="ctr" wrap="square"/>
+          <a:lstStyle/>
+          <a:p>
+            <a:pPr algn="ctr"/>
+            <a:r>
+              <a:rPr sz="2200" b="1">
+                <a:latin typeface="Verdana"/>
+                <a:ea typeface="Verdana"/>
+                <a:cs typeface="Verdana"/>
+                <a:solidFill>
+                  <a:schemeClr val="hlink"/>
+                </a:solidFill>
+                <a:hlinkClick r:id="rId7" action="ppaction://hlinksldjump"/>
+              </a:rPr>
+              <a:t>10</a:t>
+            </a:r>
+          </a:p>
+        </p:txBody>
+      </p:sp>
+      <p:sp>
+        <p:nvSpPr>
+          <p:cNvPr id="19" name="Cell_1_1">
+            <a:hlinkClick action="ppaction://hlinksldjump" r:id="rId8"/>
+          </p:cNvPr>
+          <p:cNvSpPr/>
+          <p:nvPr/>
+        </p:nvSpPr>
+        <p:spPr>
+          <a:xfrm>
+            <a:off x="4745736" y="3328416"/>
+            <a:ext cx="1554480" cy="777240"/>
+          </a:xfrm>
+          <a:prstGeom prst="roundRect">
+            <a:avLst>
+              <a:gd name="adj" fmla="val 12000"/>
+            </a:avLst>
+          </a:prstGeom>
+          <a:solidFill>
+            <a:srgbClr val="26A6E0"/>
+          </a:solidFill>
+          <a:ln>
+            <a:noFill/>
+          </a:ln>
+        </p:spPr>
+        <p:style>
+          <a:lnRef idx="1">
+            <a:schemeClr val="accent1"/>
+          </a:lnRef>
+          <a:fillRef idx="3">
+            <a:schemeClr val="accent1"/>
+          </a:fillRef>
+          <a:effectRef idx="2">
+            <a:schemeClr val="accent1"/>
+          </a:effectRef>
+          <a:fontRef idx="minor">
+            <a:schemeClr val="lt1"/>
+          </a:fontRef>
+        </p:style>
+        <p:txBody>
+          <a:bodyPr rtlCol="0" anchor="ctr" wrap="square"/>
+          <a:lstStyle/>
+          <a:p>
+            <a:pPr algn="ctr"/>
+            <a:r>
+              <a:rPr sz="2200" b="1">
+                <a:latin typeface="Verdana"/>
+                <a:ea typeface="Verdana"/>
+                <a:cs typeface="Verdana"/>
+                <a:solidFill>
+                  <a:schemeClr val="hlink"/>
+                </a:solidFill>
+                <a:hlinkClick r:id="rId8" action="ppaction://hlinksldjump"/>
+              </a:rPr>
+              <a:t>30</a:t>
+            </a:r>
+          </a:p>
+        </p:txBody>
+      </p:sp>
+      <p:sp>
+        <p:nvSpPr>
+          <p:cNvPr id="20" name="Cell_1_2">
+            <a:hlinkClick action="ppaction://hlinksldjump" r:id="rId9"/>
+          </p:cNvPr>
+          <p:cNvSpPr/>
+          <p:nvPr/>
+        </p:nvSpPr>
+        <p:spPr>
+          <a:xfrm>
+            <a:off x="6409944" y="3328416"/>
+            <a:ext cx="1554480" cy="777240"/>
+          </a:xfrm>
+          <a:prstGeom prst="roundRect">
+            <a:avLst>
+              <a:gd name="adj" fmla="val 12000"/>
+            </a:avLst>
+          </a:prstGeom>
+          <a:solidFill>
+            <a:srgbClr val="26A6E0"/>
+          </a:solidFill>
+          <a:ln>
+            <a:noFill/>
+          </a:ln>
+        </p:spPr>
+        <p:style>
+          <a:lnRef idx="1">
+            <a:schemeClr val="accent1"/>
+          </a:lnRef>
+          <a:fillRef idx="3">
+            <a:schemeClr val="accent1"/>
+          </a:fillRef>
+          <a:effectRef idx="2">
+            <a:schemeClr val="accent1"/>
+          </a:effectRef>
+          <a:fontRef idx="minor">
+            <a:schemeClr val="lt1"/>
+          </a:fontRef>
+        </p:style>
+        <p:txBody>
+          <a:bodyPr rtlCol="0" anchor="ctr" wrap="square"/>
+          <a:lstStyle/>
+          <a:p>
+            <a:pPr algn="ctr"/>
+            <a:r>
+              <a:rPr sz="2200" b="1">
+                <a:latin typeface="Verdana"/>
+                <a:ea typeface="Verdana"/>
+                <a:cs typeface="Verdana"/>
+                <a:solidFill>
+                  <a:schemeClr val="hlink"/>
+                </a:solidFill>
+                <a:hlinkClick r:id="rId9" action="ppaction://hlinksldjump"/>
+              </a:rPr>
+              <a:t>50</a:t>
+            </a:r>
+          </a:p>
+        </p:txBody>
+      </p:sp>
+      <p:sp>
+        <p:nvSpPr>
+          <p:cNvPr id="21" name="Cell_1_3">
+            <a:hlinkClick action="ppaction://hlinksldjump" r:id="rId10"/>
+          </p:cNvPr>
+          <p:cNvSpPr/>
+          <p:nvPr/>
+        </p:nvSpPr>
+        <p:spPr>
+          <a:xfrm>
+            <a:off x="8074152" y="3328416"/>
+            <a:ext cx="1554480" cy="777240"/>
+          </a:xfrm>
+          <a:prstGeom prst="roundRect">
+            <a:avLst>
+              <a:gd name="adj" fmla="val 12000"/>
+            </a:avLst>
+          </a:prstGeom>
+          <a:solidFill>
+            <a:srgbClr val="26A6E0"/>
+          </a:solidFill>
+          <a:ln>
+            <a:noFill/>
+          </a:ln>
+        </p:spPr>
+        <p:style>
+          <a:lnRef idx="1">
+            <a:schemeClr val="accent1"/>
+          </a:lnRef>
+          <a:fillRef idx="3">
+            <a:schemeClr val="accent1"/>
+          </a:fillRef>
+          <a:effectRef idx="2">
+            <a:schemeClr val="accent1"/>
+          </a:effectRef>
+          <a:fontRef idx="minor">
+            <a:schemeClr val="lt1"/>
+          </a:fontRef>
+        </p:style>
+        <p:txBody>
+          <a:bodyPr rtlCol="0" anchor="ctr" wrap="square"/>
+          <a:lstStyle/>
+          <a:p>
+            <a:pPr algn="ctr"/>
+            <a:r>
+              <a:rPr sz="2200" b="1">
+                <a:latin typeface="Verdana"/>
+                <a:ea typeface="Verdana"/>
+                <a:cs typeface="Verdana"/>
+                <a:solidFill>
+                  <a:schemeClr val="hlink"/>
+                </a:solidFill>
+                <a:hlinkClick r:id="rId10" action="ppaction://hlinksldjump"/>
+              </a:rPr>
+              <a:t>70</a:t>
+            </a:r>
+          </a:p>
+        </p:txBody>
+      </p:sp>
+      <p:sp>
+        <p:nvSpPr>
+          <p:cNvPr id="22" name="Cell_1_4">
+            <a:hlinkClick action="ppaction://hlinksldjump" r:id="rId11"/>
+          </p:cNvPr>
+          <p:cNvSpPr/>
+          <p:nvPr/>
+        </p:nvSpPr>
+        <p:spPr>
+          <a:xfrm>
+            <a:off x="9738360" y="3328416"/>
+            <a:ext cx="1554480" cy="777240"/>
+          </a:xfrm>
+          <a:prstGeom prst="roundRect">
+            <a:avLst>
+              <a:gd name="adj" fmla="val 12000"/>
+            </a:avLst>
+          </a:prstGeom>
+          <a:solidFill>
+            <a:srgbClr val="F0B42E"/>
+          </a:solidFill>
+          <a:ln>
+            <a:noFill/>
+          </a:ln>
+        </p:spPr>
+        <p:style>
+          <a:lnRef idx="1">
+            <a:schemeClr val="accent1"/>
+          </a:lnRef>
+          <a:fillRef idx="3">
+            <a:schemeClr val="accent1"/>
+          </a:fillRef>
+          <a:effectRef idx="2">
+            <a:schemeClr val="accent1"/>
+          </a:effectRef>
+          <a:fontRef idx="minor">
+            <a:schemeClr val="lt1"/>
+          </a:fontRef>
+        </p:style>
+        <p:txBody>
+          <a:bodyPr rtlCol="0" anchor="ctr" wrap="square"/>
+          <a:lstStyle/>
+          <a:p>
+            <a:pPr algn="ctr"/>
+            <a:r>
+              <a:rPr sz="2200" b="1">
+                <a:latin typeface="Verdana"/>
+                <a:ea typeface="Verdana"/>
+                <a:cs typeface="Verdana"/>
+                <a:solidFill>
+                  <a:schemeClr val="hlink"/>
+                </a:solidFill>
+                <a:hlinkClick r:id="rId11" action="ppaction://hlinksldjump"/>
+              </a:rPr>
+              <a:t>100</a:t>
+            </a:r>
+          </a:p>
+        </p:txBody>
+      </p:sp>
+      <p:sp>
+        <p:nvSpPr>
+          <p:cNvPr id="23" name="Rounded Rectangle 22"/>
+          <p:cNvSpPr/>
+          <p:nvPr/>
+        </p:nvSpPr>
+        <p:spPr>
+          <a:xfrm>
+            <a:off x="640080" y="4215384"/>
+            <a:ext cx="2331720" cy="777240"/>
+          </a:xfrm>
+          <a:prstGeom prst="roundRect">
+            <a:avLst>
+              <a:gd name="adj" fmla="val 8000"/>
             </a:avLst>
           </a:prstGeom>
           <a:solidFill>
@@ -12993,7 +13579,7 @@
           <a:p>
             <a:pPr algn="ctr"/>
             <a:r>
-              <a:rPr sz="2000" b="1">
+              <a:rPr sz="1200" b="1">
                 <a:solidFill>
                   <a:srgbClr val="FFFFFF"/>
                 </a:solidFill>
@@ -13001,27 +13587,320 @@
                 <a:ea typeface="Verdana"/>
                 <a:cs typeface="Verdana"/>
               </a:rPr>
-              <a:t>30</a:t>
-            </a:r>
-          </a:p>
-        </p:txBody>
-      </p:sp>
-      <p:sp>
-        <p:nvSpPr>
-          <p:cNvPr id="14" name="Rounded Rectangle 13">
-            <a:hlinkClick action="ppaction://hlinksldjump" r:id="rId4"/>
+              <a:t>Документы и QR</a:t>
+            </a:r>
+          </a:p>
+        </p:txBody>
+      </p:sp>
+      <p:sp>
+        <p:nvSpPr>
+          <p:cNvPr id="24" name="Cell_2_0">
+            <a:hlinkClick action="ppaction://hlinksldjump" r:id="rId12"/>
           </p:cNvPr>
           <p:cNvSpPr/>
           <p:nvPr/>
         </p:nvSpPr>
         <p:spPr>
           <a:xfrm>
-            <a:off x="6409944" y="2441448"/>
+            <a:off x="3081528" y="4215384"/>
             <a:ext cx="1554480" cy="777240"/>
           </a:xfrm>
           <a:prstGeom prst="roundRect">
             <a:avLst>
               <a:gd name="adj" fmla="val 12000"/>
+            </a:avLst>
+          </a:prstGeom>
+          <a:solidFill>
+            <a:srgbClr val="26A6E0"/>
+          </a:solidFill>
+          <a:ln>
+            <a:noFill/>
+          </a:ln>
+        </p:spPr>
+        <p:style>
+          <a:lnRef idx="1">
+            <a:schemeClr val="accent1"/>
+          </a:lnRef>
+          <a:fillRef idx="3">
+            <a:schemeClr val="accent1"/>
+          </a:fillRef>
+          <a:effectRef idx="2">
+            <a:schemeClr val="accent1"/>
+          </a:effectRef>
+          <a:fontRef idx="minor">
+            <a:schemeClr val="lt1"/>
+          </a:fontRef>
+        </p:style>
+        <p:txBody>
+          <a:bodyPr rtlCol="0" anchor="ctr" wrap="square"/>
+          <a:lstStyle/>
+          <a:p>
+            <a:pPr algn="ctr"/>
+            <a:r>
+              <a:rPr sz="2200" b="1">
+                <a:latin typeface="Verdana"/>
+                <a:ea typeface="Verdana"/>
+                <a:cs typeface="Verdana"/>
+                <a:solidFill>
+                  <a:schemeClr val="hlink"/>
+                </a:solidFill>
+                <a:hlinkClick r:id="rId12" action="ppaction://hlinksldjump"/>
+              </a:rPr>
+              <a:t>10</a:t>
+            </a:r>
+          </a:p>
+        </p:txBody>
+      </p:sp>
+      <p:sp>
+        <p:nvSpPr>
+          <p:cNvPr id="25" name="Cell_2_1">
+            <a:hlinkClick action="ppaction://hlinksldjump" r:id="rId13"/>
+          </p:cNvPr>
+          <p:cNvSpPr/>
+          <p:nvPr/>
+        </p:nvSpPr>
+        <p:spPr>
+          <a:xfrm>
+            <a:off x="4745736" y="4215384"/>
+            <a:ext cx="1554480" cy="777240"/>
+          </a:xfrm>
+          <a:prstGeom prst="roundRect">
+            <a:avLst>
+              <a:gd name="adj" fmla="val 12000"/>
+            </a:avLst>
+          </a:prstGeom>
+          <a:solidFill>
+            <a:srgbClr val="26A6E0"/>
+          </a:solidFill>
+          <a:ln>
+            <a:noFill/>
+          </a:ln>
+        </p:spPr>
+        <p:style>
+          <a:lnRef idx="1">
+            <a:schemeClr val="accent1"/>
+          </a:lnRef>
+          <a:fillRef idx="3">
+            <a:schemeClr val="accent1"/>
+          </a:fillRef>
+          <a:effectRef idx="2">
+            <a:schemeClr val="accent1"/>
+          </a:effectRef>
+          <a:fontRef idx="minor">
+            <a:schemeClr val="lt1"/>
+          </a:fontRef>
+        </p:style>
+        <p:txBody>
+          <a:bodyPr rtlCol="0" anchor="ctr" wrap="square"/>
+          <a:lstStyle/>
+          <a:p>
+            <a:pPr algn="ctr"/>
+            <a:r>
+              <a:rPr sz="2200" b="1">
+                <a:latin typeface="Verdana"/>
+                <a:ea typeface="Verdana"/>
+                <a:cs typeface="Verdana"/>
+                <a:solidFill>
+                  <a:schemeClr val="hlink"/>
+                </a:solidFill>
+                <a:hlinkClick r:id="rId13" action="ppaction://hlinksldjump"/>
+              </a:rPr>
+              <a:t>30</a:t>
+            </a:r>
+          </a:p>
+        </p:txBody>
+      </p:sp>
+      <p:sp>
+        <p:nvSpPr>
+          <p:cNvPr id="26" name="Cell_2_2">
+            <a:hlinkClick action="ppaction://hlinksldjump" r:id="rId14"/>
+          </p:cNvPr>
+          <p:cNvSpPr/>
+          <p:nvPr/>
+        </p:nvSpPr>
+        <p:spPr>
+          <a:xfrm>
+            <a:off x="6409944" y="4215384"/>
+            <a:ext cx="1554480" cy="777240"/>
+          </a:xfrm>
+          <a:prstGeom prst="roundRect">
+            <a:avLst>
+              <a:gd name="adj" fmla="val 12000"/>
+            </a:avLst>
+          </a:prstGeom>
+          <a:solidFill>
+            <a:srgbClr val="26A6E0"/>
+          </a:solidFill>
+          <a:ln>
+            <a:noFill/>
+          </a:ln>
+        </p:spPr>
+        <p:style>
+          <a:lnRef idx="1">
+            <a:schemeClr val="accent1"/>
+          </a:lnRef>
+          <a:fillRef idx="3">
+            <a:schemeClr val="accent1"/>
+          </a:fillRef>
+          <a:effectRef idx="2">
+            <a:schemeClr val="accent1"/>
+          </a:effectRef>
+          <a:fontRef idx="minor">
+            <a:schemeClr val="lt1"/>
+          </a:fontRef>
+        </p:style>
+        <p:txBody>
+          <a:bodyPr rtlCol="0" anchor="ctr" wrap="square"/>
+          <a:lstStyle/>
+          <a:p>
+            <a:pPr algn="ctr"/>
+            <a:r>
+              <a:rPr sz="2200" b="1">
+                <a:latin typeface="Verdana"/>
+                <a:ea typeface="Verdana"/>
+                <a:cs typeface="Verdana"/>
+                <a:solidFill>
+                  <a:schemeClr val="hlink"/>
+                </a:solidFill>
+                <a:hlinkClick r:id="rId14" action="ppaction://hlinksldjump"/>
+              </a:rPr>
+              <a:t>50</a:t>
+            </a:r>
+          </a:p>
+        </p:txBody>
+      </p:sp>
+      <p:sp>
+        <p:nvSpPr>
+          <p:cNvPr id="27" name="Cell_2_3">
+            <a:hlinkClick action="ppaction://hlinksldjump" r:id="rId15"/>
+          </p:cNvPr>
+          <p:cNvSpPr/>
+          <p:nvPr/>
+        </p:nvSpPr>
+        <p:spPr>
+          <a:xfrm>
+            <a:off x="8074152" y="4215384"/>
+            <a:ext cx="1554480" cy="777240"/>
+          </a:xfrm>
+          <a:prstGeom prst="roundRect">
+            <a:avLst>
+              <a:gd name="adj" fmla="val 12000"/>
+            </a:avLst>
+          </a:prstGeom>
+          <a:solidFill>
+            <a:srgbClr val="26A6E0"/>
+          </a:solidFill>
+          <a:ln>
+            <a:noFill/>
+          </a:ln>
+        </p:spPr>
+        <p:style>
+          <a:lnRef idx="1">
+            <a:schemeClr val="accent1"/>
+          </a:lnRef>
+          <a:fillRef idx="3">
+            <a:schemeClr val="accent1"/>
+          </a:fillRef>
+          <a:effectRef idx="2">
+            <a:schemeClr val="accent1"/>
+          </a:effectRef>
+          <a:fontRef idx="minor">
+            <a:schemeClr val="lt1"/>
+          </a:fontRef>
+        </p:style>
+        <p:txBody>
+          <a:bodyPr rtlCol="0" anchor="ctr" wrap="square"/>
+          <a:lstStyle/>
+          <a:p>
+            <a:pPr algn="ctr"/>
+            <a:r>
+              <a:rPr sz="2200" b="1">
+                <a:latin typeface="Verdana"/>
+                <a:ea typeface="Verdana"/>
+                <a:cs typeface="Verdana"/>
+                <a:solidFill>
+                  <a:schemeClr val="hlink"/>
+                </a:solidFill>
+                <a:hlinkClick r:id="rId15" action="ppaction://hlinksldjump"/>
+              </a:rPr>
+              <a:t>70</a:t>
+            </a:r>
+          </a:p>
+        </p:txBody>
+      </p:sp>
+      <p:sp>
+        <p:nvSpPr>
+          <p:cNvPr id="28" name="Cell_2_4">
+            <a:hlinkClick action="ppaction://hlinksldjump" r:id="rId16"/>
+          </p:cNvPr>
+          <p:cNvSpPr/>
+          <p:nvPr/>
+        </p:nvSpPr>
+        <p:spPr>
+          <a:xfrm>
+            <a:off x="9738360" y="4215384"/>
+            <a:ext cx="1554480" cy="777240"/>
+          </a:xfrm>
+          <a:prstGeom prst="roundRect">
+            <a:avLst>
+              <a:gd name="adj" fmla="val 12000"/>
+            </a:avLst>
+          </a:prstGeom>
+          <a:solidFill>
+            <a:srgbClr val="F0B42E"/>
+          </a:solidFill>
+          <a:ln>
+            <a:noFill/>
+          </a:ln>
+        </p:spPr>
+        <p:style>
+          <a:lnRef idx="1">
+            <a:schemeClr val="accent1"/>
+          </a:lnRef>
+          <a:fillRef idx="3">
+            <a:schemeClr val="accent1"/>
+          </a:fillRef>
+          <a:effectRef idx="2">
+            <a:schemeClr val="accent1"/>
+          </a:effectRef>
+          <a:fontRef idx="minor">
+            <a:schemeClr val="lt1"/>
+          </a:fontRef>
+        </p:style>
+        <p:txBody>
+          <a:bodyPr rtlCol="0" anchor="ctr" wrap="square"/>
+          <a:lstStyle/>
+          <a:p>
+            <a:pPr algn="ctr"/>
+            <a:r>
+              <a:rPr sz="2200" b="1">
+                <a:latin typeface="Verdana"/>
+                <a:ea typeface="Verdana"/>
+                <a:cs typeface="Verdana"/>
+                <a:solidFill>
+                  <a:schemeClr val="hlink"/>
+                </a:solidFill>
+                <a:hlinkClick r:id="rId16" action="ppaction://hlinksldjump"/>
+              </a:rPr>
+              <a:t>100</a:t>
+            </a:r>
+          </a:p>
+        </p:txBody>
+      </p:sp>
+      <p:sp>
+        <p:nvSpPr>
+          <p:cNvPr id="29" name="Rounded Rectangle 28"/>
+          <p:cNvSpPr/>
+          <p:nvPr/>
+        </p:nvSpPr>
+        <p:spPr>
+          <a:xfrm>
+            <a:off x="640080" y="5102352"/>
+            <a:ext cx="2331720" cy="777240"/>
+          </a:xfrm>
+          <a:prstGeom prst="roundRect">
+            <a:avLst>
+              <a:gd name="adj" fmla="val 8000"/>
             </a:avLst>
           </a:prstGeom>
           <a:solidFill>
@@ -13051,7 +13930,7 @@
           <a:p>
             <a:pPr algn="ctr"/>
             <a:r>
-              <a:rPr sz="2000" b="1">
+              <a:rPr sz="1200" b="1">
                 <a:solidFill>
                   <a:srgbClr val="FFFFFF"/>
                 </a:solidFill>
@@ -13059,27 +13938,320 @@
                 <a:ea typeface="Verdana"/>
                 <a:cs typeface="Verdana"/>
               </a:rPr>
-              <a:t>50</a:t>
-            </a:r>
-          </a:p>
-        </p:txBody>
-      </p:sp>
-      <p:sp>
-        <p:nvSpPr>
-          <p:cNvPr id="15" name="Rounded Rectangle 14">
-            <a:hlinkClick action="ppaction://hlinksldjump" r:id="rId5"/>
+              <a:t>Экспедиция и процесс</a:t>
+            </a:r>
+          </a:p>
+        </p:txBody>
+      </p:sp>
+      <p:sp>
+        <p:nvSpPr>
+          <p:cNvPr id="30" name="Cell_3_0">
+            <a:hlinkClick action="ppaction://hlinksldjump" r:id="rId17"/>
           </p:cNvPr>
           <p:cNvSpPr/>
           <p:nvPr/>
         </p:nvSpPr>
         <p:spPr>
           <a:xfrm>
-            <a:off x="8074152" y="2441448"/>
+            <a:off x="3081528" y="5102352"/>
             <a:ext cx="1554480" cy="777240"/>
           </a:xfrm>
           <a:prstGeom prst="roundRect">
             <a:avLst>
               <a:gd name="adj" fmla="val 12000"/>
+            </a:avLst>
+          </a:prstGeom>
+          <a:solidFill>
+            <a:srgbClr val="26A6E0"/>
+          </a:solidFill>
+          <a:ln>
+            <a:noFill/>
+          </a:ln>
+        </p:spPr>
+        <p:style>
+          <a:lnRef idx="1">
+            <a:schemeClr val="accent1"/>
+          </a:lnRef>
+          <a:fillRef idx="3">
+            <a:schemeClr val="accent1"/>
+          </a:fillRef>
+          <a:effectRef idx="2">
+            <a:schemeClr val="accent1"/>
+          </a:effectRef>
+          <a:fontRef idx="minor">
+            <a:schemeClr val="lt1"/>
+          </a:fontRef>
+        </p:style>
+        <p:txBody>
+          <a:bodyPr rtlCol="0" anchor="ctr" wrap="square"/>
+          <a:lstStyle/>
+          <a:p>
+            <a:pPr algn="ctr"/>
+            <a:r>
+              <a:rPr sz="2200" b="1">
+                <a:latin typeface="Verdana"/>
+                <a:ea typeface="Verdana"/>
+                <a:cs typeface="Verdana"/>
+                <a:solidFill>
+                  <a:schemeClr val="hlink"/>
+                </a:solidFill>
+                <a:hlinkClick r:id="rId17" action="ppaction://hlinksldjump"/>
+              </a:rPr>
+              <a:t>10</a:t>
+            </a:r>
+          </a:p>
+        </p:txBody>
+      </p:sp>
+      <p:sp>
+        <p:nvSpPr>
+          <p:cNvPr id="31" name="Cell_3_1">
+            <a:hlinkClick action="ppaction://hlinksldjump" r:id="rId18"/>
+          </p:cNvPr>
+          <p:cNvSpPr/>
+          <p:nvPr/>
+        </p:nvSpPr>
+        <p:spPr>
+          <a:xfrm>
+            <a:off x="4745736" y="5102352"/>
+            <a:ext cx="1554480" cy="777240"/>
+          </a:xfrm>
+          <a:prstGeom prst="roundRect">
+            <a:avLst>
+              <a:gd name="adj" fmla="val 12000"/>
+            </a:avLst>
+          </a:prstGeom>
+          <a:solidFill>
+            <a:srgbClr val="26A6E0"/>
+          </a:solidFill>
+          <a:ln>
+            <a:noFill/>
+          </a:ln>
+        </p:spPr>
+        <p:style>
+          <a:lnRef idx="1">
+            <a:schemeClr val="accent1"/>
+          </a:lnRef>
+          <a:fillRef idx="3">
+            <a:schemeClr val="accent1"/>
+          </a:fillRef>
+          <a:effectRef idx="2">
+            <a:schemeClr val="accent1"/>
+          </a:effectRef>
+          <a:fontRef idx="minor">
+            <a:schemeClr val="lt1"/>
+          </a:fontRef>
+        </p:style>
+        <p:txBody>
+          <a:bodyPr rtlCol="0" anchor="ctr" wrap="square"/>
+          <a:lstStyle/>
+          <a:p>
+            <a:pPr algn="ctr"/>
+            <a:r>
+              <a:rPr sz="2200" b="1">
+                <a:latin typeface="Verdana"/>
+                <a:ea typeface="Verdana"/>
+                <a:cs typeface="Verdana"/>
+                <a:solidFill>
+                  <a:schemeClr val="hlink"/>
+                </a:solidFill>
+                <a:hlinkClick r:id="rId18" action="ppaction://hlinksldjump"/>
+              </a:rPr>
+              <a:t>30</a:t>
+            </a:r>
+          </a:p>
+        </p:txBody>
+      </p:sp>
+      <p:sp>
+        <p:nvSpPr>
+          <p:cNvPr id="32" name="Cell_3_2">
+            <a:hlinkClick action="ppaction://hlinksldjump" r:id="rId19"/>
+          </p:cNvPr>
+          <p:cNvSpPr/>
+          <p:nvPr/>
+        </p:nvSpPr>
+        <p:spPr>
+          <a:xfrm>
+            <a:off x="6409944" y="5102352"/>
+            <a:ext cx="1554480" cy="777240"/>
+          </a:xfrm>
+          <a:prstGeom prst="roundRect">
+            <a:avLst>
+              <a:gd name="adj" fmla="val 12000"/>
+            </a:avLst>
+          </a:prstGeom>
+          <a:solidFill>
+            <a:srgbClr val="26A6E0"/>
+          </a:solidFill>
+          <a:ln>
+            <a:noFill/>
+          </a:ln>
+        </p:spPr>
+        <p:style>
+          <a:lnRef idx="1">
+            <a:schemeClr val="accent1"/>
+          </a:lnRef>
+          <a:fillRef idx="3">
+            <a:schemeClr val="accent1"/>
+          </a:fillRef>
+          <a:effectRef idx="2">
+            <a:schemeClr val="accent1"/>
+          </a:effectRef>
+          <a:fontRef idx="minor">
+            <a:schemeClr val="lt1"/>
+          </a:fontRef>
+        </p:style>
+        <p:txBody>
+          <a:bodyPr rtlCol="0" anchor="ctr" wrap="square"/>
+          <a:lstStyle/>
+          <a:p>
+            <a:pPr algn="ctr"/>
+            <a:r>
+              <a:rPr sz="2200" b="1">
+                <a:latin typeface="Verdana"/>
+                <a:ea typeface="Verdana"/>
+                <a:cs typeface="Verdana"/>
+                <a:solidFill>
+                  <a:schemeClr val="hlink"/>
+                </a:solidFill>
+                <a:hlinkClick r:id="rId19" action="ppaction://hlinksldjump"/>
+              </a:rPr>
+              <a:t>50</a:t>
+            </a:r>
+          </a:p>
+        </p:txBody>
+      </p:sp>
+      <p:sp>
+        <p:nvSpPr>
+          <p:cNvPr id="33" name="Cell_3_3">
+            <a:hlinkClick action="ppaction://hlinksldjump" r:id="rId20"/>
+          </p:cNvPr>
+          <p:cNvSpPr/>
+          <p:nvPr/>
+        </p:nvSpPr>
+        <p:spPr>
+          <a:xfrm>
+            <a:off x="8074152" y="5102352"/>
+            <a:ext cx="1554480" cy="777240"/>
+          </a:xfrm>
+          <a:prstGeom prst="roundRect">
+            <a:avLst>
+              <a:gd name="adj" fmla="val 12000"/>
+            </a:avLst>
+          </a:prstGeom>
+          <a:solidFill>
+            <a:srgbClr val="26A6E0"/>
+          </a:solidFill>
+          <a:ln>
+            <a:noFill/>
+          </a:ln>
+        </p:spPr>
+        <p:style>
+          <a:lnRef idx="1">
+            <a:schemeClr val="accent1"/>
+          </a:lnRef>
+          <a:fillRef idx="3">
+            <a:schemeClr val="accent1"/>
+          </a:fillRef>
+          <a:effectRef idx="2">
+            <a:schemeClr val="accent1"/>
+          </a:effectRef>
+          <a:fontRef idx="minor">
+            <a:schemeClr val="lt1"/>
+          </a:fontRef>
+        </p:style>
+        <p:txBody>
+          <a:bodyPr rtlCol="0" anchor="ctr" wrap="square"/>
+          <a:lstStyle/>
+          <a:p>
+            <a:pPr algn="ctr"/>
+            <a:r>
+              <a:rPr sz="2200" b="1">
+                <a:latin typeface="Verdana"/>
+                <a:ea typeface="Verdana"/>
+                <a:cs typeface="Verdana"/>
+                <a:solidFill>
+                  <a:schemeClr val="hlink"/>
+                </a:solidFill>
+                <a:hlinkClick r:id="rId20" action="ppaction://hlinksldjump"/>
+              </a:rPr>
+              <a:t>70</a:t>
+            </a:r>
+          </a:p>
+        </p:txBody>
+      </p:sp>
+      <p:sp>
+        <p:nvSpPr>
+          <p:cNvPr id="34" name="Cell_3_4">
+            <a:hlinkClick action="ppaction://hlinksldjump" r:id="rId21"/>
+          </p:cNvPr>
+          <p:cNvSpPr/>
+          <p:nvPr/>
+        </p:nvSpPr>
+        <p:spPr>
+          <a:xfrm>
+            <a:off x="9738360" y="5102352"/>
+            <a:ext cx="1554480" cy="777240"/>
+          </a:xfrm>
+          <a:prstGeom prst="roundRect">
+            <a:avLst>
+              <a:gd name="adj" fmla="val 12000"/>
+            </a:avLst>
+          </a:prstGeom>
+          <a:solidFill>
+            <a:srgbClr val="F0B42E"/>
+          </a:solidFill>
+          <a:ln>
+            <a:noFill/>
+          </a:ln>
+        </p:spPr>
+        <p:style>
+          <a:lnRef idx="1">
+            <a:schemeClr val="accent1"/>
+          </a:lnRef>
+          <a:fillRef idx="3">
+            <a:schemeClr val="accent1"/>
+          </a:fillRef>
+          <a:effectRef idx="2">
+            <a:schemeClr val="accent1"/>
+          </a:effectRef>
+          <a:fontRef idx="minor">
+            <a:schemeClr val="lt1"/>
+          </a:fontRef>
+        </p:style>
+        <p:txBody>
+          <a:bodyPr rtlCol="0" anchor="ctr" wrap="square"/>
+          <a:lstStyle/>
+          <a:p>
+            <a:pPr algn="ctr"/>
+            <a:r>
+              <a:rPr sz="2200" b="1">
+                <a:latin typeface="Verdana"/>
+                <a:ea typeface="Verdana"/>
+                <a:cs typeface="Verdana"/>
+                <a:solidFill>
+                  <a:schemeClr val="hlink"/>
+                </a:solidFill>
+                <a:hlinkClick r:id="rId21" action="ppaction://hlinksldjump"/>
+              </a:rPr>
+              <a:t>100</a:t>
+            </a:r>
+          </a:p>
+        </p:txBody>
+      </p:sp>
+      <p:sp>
+        <p:nvSpPr>
+          <p:cNvPr id="35" name="Rounded Rectangle 34"/>
+          <p:cNvSpPr/>
+          <p:nvPr/>
+        </p:nvSpPr>
+        <p:spPr>
+          <a:xfrm>
+            <a:off x="640080" y="5989320"/>
+            <a:ext cx="2331720" cy="777240"/>
+          </a:xfrm>
+          <a:prstGeom prst="roundRect">
+            <a:avLst>
+              <a:gd name="adj" fmla="val 8000"/>
             </a:avLst>
           </a:prstGeom>
           <a:solidFill>
@@ -13109,7 +14281,7 @@
           <a:p>
             <a:pPr algn="ctr"/>
             <a:r>
-              <a:rPr sz="2000" b="1">
+              <a:rPr sz="1200" b="1">
                 <a:solidFill>
                   <a:srgbClr val="FFFFFF"/>
                 </a:solidFill>
@@ -13117,22 +14289,258 @@
                 <a:ea typeface="Verdana"/>
                 <a:cs typeface="Verdana"/>
               </a:rPr>
-              <a:t>70</a:t>
-            </a:r>
-          </a:p>
-        </p:txBody>
-      </p:sp>
-      <p:sp>
-        <p:nvSpPr>
-          <p:cNvPr id="16" name="Rounded Rectangle 15">
-            <a:hlinkClick action="ppaction://hlinksldjump" r:id="rId6"/>
+              <a:t>1С-ЭПД и Доки</a:t>
+            </a:r>
+          </a:p>
+        </p:txBody>
+      </p:sp>
+      <p:sp>
+        <p:nvSpPr>
+          <p:cNvPr id="36" name="Cell_4_0">
+            <a:hlinkClick action="ppaction://hlinksldjump" r:id="rId22"/>
           </p:cNvPr>
           <p:cNvSpPr/>
           <p:nvPr/>
         </p:nvSpPr>
         <p:spPr>
           <a:xfrm>
-            <a:off x="9738360" y="2441448"/>
+            <a:off x="3081528" y="5989320"/>
+            <a:ext cx="1554480" cy="777240"/>
+          </a:xfrm>
+          <a:prstGeom prst="roundRect">
+            <a:avLst>
+              <a:gd name="adj" fmla="val 12000"/>
+            </a:avLst>
+          </a:prstGeom>
+          <a:solidFill>
+            <a:srgbClr val="26A6E0"/>
+          </a:solidFill>
+          <a:ln>
+            <a:noFill/>
+          </a:ln>
+        </p:spPr>
+        <p:style>
+          <a:lnRef idx="1">
+            <a:schemeClr val="accent1"/>
+          </a:lnRef>
+          <a:fillRef idx="3">
+            <a:schemeClr val="accent1"/>
+          </a:fillRef>
+          <a:effectRef idx="2">
+            <a:schemeClr val="accent1"/>
+          </a:effectRef>
+          <a:fontRef idx="minor">
+            <a:schemeClr val="lt1"/>
+          </a:fontRef>
+        </p:style>
+        <p:txBody>
+          <a:bodyPr rtlCol="0" anchor="ctr" wrap="square"/>
+          <a:lstStyle/>
+          <a:p>
+            <a:pPr algn="ctr"/>
+            <a:r>
+              <a:rPr sz="2200" b="1">
+                <a:latin typeface="Verdana"/>
+                <a:ea typeface="Verdana"/>
+                <a:cs typeface="Verdana"/>
+                <a:solidFill>
+                  <a:schemeClr val="hlink"/>
+                </a:solidFill>
+                <a:hlinkClick r:id="rId22" action="ppaction://hlinksldjump"/>
+              </a:rPr>
+              <a:t>10</a:t>
+            </a:r>
+          </a:p>
+        </p:txBody>
+      </p:sp>
+      <p:sp>
+        <p:nvSpPr>
+          <p:cNvPr id="37" name="Cell_4_1">
+            <a:hlinkClick action="ppaction://hlinksldjump" r:id="rId23"/>
+          </p:cNvPr>
+          <p:cNvSpPr/>
+          <p:nvPr/>
+        </p:nvSpPr>
+        <p:spPr>
+          <a:xfrm>
+            <a:off x="4745736" y="5989320"/>
+            <a:ext cx="1554480" cy="777240"/>
+          </a:xfrm>
+          <a:prstGeom prst="roundRect">
+            <a:avLst>
+              <a:gd name="adj" fmla="val 12000"/>
+            </a:avLst>
+          </a:prstGeom>
+          <a:solidFill>
+            <a:srgbClr val="26A6E0"/>
+          </a:solidFill>
+          <a:ln>
+            <a:noFill/>
+          </a:ln>
+        </p:spPr>
+        <p:style>
+          <a:lnRef idx="1">
+            <a:schemeClr val="accent1"/>
+          </a:lnRef>
+          <a:fillRef idx="3">
+            <a:schemeClr val="accent1"/>
+          </a:fillRef>
+          <a:effectRef idx="2">
+            <a:schemeClr val="accent1"/>
+          </a:effectRef>
+          <a:fontRef idx="minor">
+            <a:schemeClr val="lt1"/>
+          </a:fontRef>
+        </p:style>
+        <p:txBody>
+          <a:bodyPr rtlCol="0" anchor="ctr" wrap="square"/>
+          <a:lstStyle/>
+          <a:p>
+            <a:pPr algn="ctr"/>
+            <a:r>
+              <a:rPr sz="2200" b="1">
+                <a:latin typeface="Verdana"/>
+                <a:ea typeface="Verdana"/>
+                <a:cs typeface="Verdana"/>
+                <a:solidFill>
+                  <a:schemeClr val="hlink"/>
+                </a:solidFill>
+                <a:hlinkClick r:id="rId23" action="ppaction://hlinksldjump"/>
+              </a:rPr>
+              <a:t>30</a:t>
+            </a:r>
+          </a:p>
+        </p:txBody>
+      </p:sp>
+      <p:sp>
+        <p:nvSpPr>
+          <p:cNvPr id="38" name="Cell_4_2">
+            <a:hlinkClick action="ppaction://hlinksldjump" r:id="rId24"/>
+          </p:cNvPr>
+          <p:cNvSpPr/>
+          <p:nvPr/>
+        </p:nvSpPr>
+        <p:spPr>
+          <a:xfrm>
+            <a:off x="6409944" y="5989320"/>
+            <a:ext cx="1554480" cy="777240"/>
+          </a:xfrm>
+          <a:prstGeom prst="roundRect">
+            <a:avLst>
+              <a:gd name="adj" fmla="val 12000"/>
+            </a:avLst>
+          </a:prstGeom>
+          <a:solidFill>
+            <a:srgbClr val="26A6E0"/>
+          </a:solidFill>
+          <a:ln>
+            <a:noFill/>
+          </a:ln>
+        </p:spPr>
+        <p:style>
+          <a:lnRef idx="1">
+            <a:schemeClr val="accent1"/>
+          </a:lnRef>
+          <a:fillRef idx="3">
+            <a:schemeClr val="accent1"/>
+          </a:fillRef>
+          <a:effectRef idx="2">
+            <a:schemeClr val="accent1"/>
+          </a:effectRef>
+          <a:fontRef idx="minor">
+            <a:schemeClr val="lt1"/>
+          </a:fontRef>
+        </p:style>
+        <p:txBody>
+          <a:bodyPr rtlCol="0" anchor="ctr" wrap="square"/>
+          <a:lstStyle/>
+          <a:p>
+            <a:pPr algn="ctr"/>
+            <a:r>
+              <a:rPr sz="2200" b="1">
+                <a:latin typeface="Verdana"/>
+                <a:ea typeface="Verdana"/>
+                <a:cs typeface="Verdana"/>
+                <a:solidFill>
+                  <a:schemeClr val="hlink"/>
+                </a:solidFill>
+                <a:hlinkClick r:id="rId24" action="ppaction://hlinksldjump"/>
+              </a:rPr>
+              <a:t>50</a:t>
+            </a:r>
+          </a:p>
+        </p:txBody>
+      </p:sp>
+      <p:sp>
+        <p:nvSpPr>
+          <p:cNvPr id="39" name="Cell_4_3">
+            <a:hlinkClick action="ppaction://hlinksldjump" r:id="rId25"/>
+          </p:cNvPr>
+          <p:cNvSpPr/>
+          <p:nvPr/>
+        </p:nvSpPr>
+        <p:spPr>
+          <a:xfrm>
+            <a:off x="8074152" y="5989320"/>
+            <a:ext cx="1554480" cy="777240"/>
+          </a:xfrm>
+          <a:prstGeom prst="roundRect">
+            <a:avLst>
+              <a:gd name="adj" fmla="val 12000"/>
+            </a:avLst>
+          </a:prstGeom>
+          <a:solidFill>
+            <a:srgbClr val="26A6E0"/>
+          </a:solidFill>
+          <a:ln>
+            <a:noFill/>
+          </a:ln>
+        </p:spPr>
+        <p:style>
+          <a:lnRef idx="1">
+            <a:schemeClr val="accent1"/>
+          </a:lnRef>
+          <a:fillRef idx="3">
+            <a:schemeClr val="accent1"/>
+          </a:fillRef>
+          <a:effectRef idx="2">
+            <a:schemeClr val="accent1"/>
+          </a:effectRef>
+          <a:fontRef idx="minor">
+            <a:schemeClr val="lt1"/>
+          </a:fontRef>
+        </p:style>
+        <p:txBody>
+          <a:bodyPr rtlCol="0" anchor="ctr" wrap="square"/>
+          <a:lstStyle/>
+          <a:p>
+            <a:pPr algn="ctr"/>
+            <a:r>
+              <a:rPr sz="2200" b="1">
+                <a:latin typeface="Verdana"/>
+                <a:ea typeface="Verdana"/>
+                <a:cs typeface="Verdana"/>
+                <a:solidFill>
+                  <a:schemeClr val="hlink"/>
+                </a:solidFill>
+                <a:hlinkClick r:id="rId25" action="ppaction://hlinksldjump"/>
+              </a:rPr>
+              <a:t>70</a:t>
+            </a:r>
+          </a:p>
+        </p:txBody>
+      </p:sp>
+      <p:sp>
+        <p:nvSpPr>
+          <p:cNvPr id="40" name="Cell_4_4">
+            <a:hlinkClick action="ppaction://hlinksldjump" r:id="rId26"/>
+          </p:cNvPr>
+          <p:cNvSpPr/>
+          <p:nvPr/>
+        </p:nvSpPr>
+        <p:spPr>
+          <a:xfrm>
+            <a:off x="9738360" y="5989320"/>
             <a:ext cx="1554480" cy="777240"/>
           </a:xfrm>
           <a:prstGeom prst="roundRect">
@@ -13167,1397 +14575,14 @@
           <a:p>
             <a:pPr algn="ctr"/>
             <a:r>
-              <a:rPr sz="2000" b="1">
-                <a:solidFill>
-                  <a:srgbClr val="1A1A1A"/>
-                </a:solidFill>
-                <a:latin typeface="Verdana"/>
-                <a:ea typeface="Verdana"/>
-                <a:cs typeface="Verdana"/>
-              </a:rPr>
-              <a:t>100</a:t>
-            </a:r>
-          </a:p>
-        </p:txBody>
-      </p:sp>
-      <p:sp>
-        <p:nvSpPr>
-          <p:cNvPr id="17" name="Rounded Rectangle 16"/>
-          <p:cNvSpPr/>
-          <p:nvPr/>
-        </p:nvSpPr>
-        <p:spPr>
-          <a:xfrm>
-            <a:off x="640080" y="3328416"/>
-            <a:ext cx="2331720" cy="777240"/>
-          </a:xfrm>
-          <a:prstGeom prst="roundRect">
-            <a:avLst>
-              <a:gd name="adj" fmla="val 8000"/>
-            </a:avLst>
-          </a:prstGeom>
-          <a:solidFill>
-            <a:srgbClr val="3F3F3F"/>
-          </a:solidFill>
-          <a:ln>
-            <a:noFill/>
-          </a:ln>
-        </p:spPr>
-        <p:style>
-          <a:lnRef idx="1">
-            <a:schemeClr val="accent1"/>
-          </a:lnRef>
-          <a:fillRef idx="3">
-            <a:schemeClr val="accent1"/>
-          </a:fillRef>
-          <a:effectRef idx="2">
-            <a:schemeClr val="accent1"/>
-          </a:effectRef>
-          <a:fontRef idx="minor">
-            <a:schemeClr val="lt1"/>
-          </a:fontRef>
-        </p:style>
-        <p:txBody>
-          <a:bodyPr rtlCol="0" anchor="ctr" wrap="square"/>
-          <a:lstStyle/>
-          <a:p>
-            <a:pPr algn="ctr"/>
-            <a:r>
-              <a:rPr sz="1200" b="1">
-                <a:solidFill>
-                  <a:srgbClr val="FFFFFF"/>
-                </a:solidFill>
-                <a:latin typeface="Verdana"/>
-                <a:ea typeface="Verdana"/>
-                <a:cs typeface="Verdana"/>
-              </a:rPr>
-              <a:t>ЭТрН и обязательность</a:t>
-            </a:r>
-          </a:p>
-        </p:txBody>
-      </p:sp>
-      <p:sp>
-        <p:nvSpPr>
-          <p:cNvPr id="18" name="Rounded Rectangle 17">
-            <a:hlinkClick action="ppaction://hlinksldjump" r:id="rId7"/>
-          </p:cNvPr>
-          <p:cNvSpPr/>
-          <p:nvPr/>
-        </p:nvSpPr>
-        <p:spPr>
-          <a:xfrm>
-            <a:off x="3081528" y="3328416"/>
-            <a:ext cx="1554480" cy="777240"/>
-          </a:xfrm>
-          <a:prstGeom prst="roundRect">
-            <a:avLst>
-              <a:gd name="adj" fmla="val 12000"/>
-            </a:avLst>
-          </a:prstGeom>
-          <a:solidFill>
-            <a:srgbClr val="3F3F3F"/>
-          </a:solidFill>
-          <a:ln>
-            <a:noFill/>
-          </a:ln>
-        </p:spPr>
-        <p:style>
-          <a:lnRef idx="1">
-            <a:schemeClr val="accent1"/>
-          </a:lnRef>
-          <a:fillRef idx="3">
-            <a:schemeClr val="accent1"/>
-          </a:fillRef>
-          <a:effectRef idx="2">
-            <a:schemeClr val="accent1"/>
-          </a:effectRef>
-          <a:fontRef idx="minor">
-            <a:schemeClr val="lt1"/>
-          </a:fontRef>
-        </p:style>
-        <p:txBody>
-          <a:bodyPr rtlCol="0" anchor="ctr" wrap="square"/>
-          <a:lstStyle/>
-          <a:p>
-            <a:pPr algn="ctr"/>
-            <a:r>
-              <a:rPr sz="2000" b="1">
-                <a:solidFill>
-                  <a:srgbClr val="FFFFFF"/>
-                </a:solidFill>
-                <a:latin typeface="Verdana"/>
-                <a:ea typeface="Verdana"/>
-                <a:cs typeface="Verdana"/>
-              </a:rPr>
-              <a:t>10</a:t>
-            </a:r>
-          </a:p>
-        </p:txBody>
-      </p:sp>
-      <p:sp>
-        <p:nvSpPr>
-          <p:cNvPr id="19" name="Rounded Rectangle 18">
-            <a:hlinkClick action="ppaction://hlinksldjump" r:id="rId8"/>
-          </p:cNvPr>
-          <p:cNvSpPr/>
-          <p:nvPr/>
-        </p:nvSpPr>
-        <p:spPr>
-          <a:xfrm>
-            <a:off x="4745736" y="3328416"/>
-            <a:ext cx="1554480" cy="777240"/>
-          </a:xfrm>
-          <a:prstGeom prst="roundRect">
-            <a:avLst>
-              <a:gd name="adj" fmla="val 12000"/>
-            </a:avLst>
-          </a:prstGeom>
-          <a:solidFill>
-            <a:srgbClr val="3F3F3F"/>
-          </a:solidFill>
-          <a:ln>
-            <a:noFill/>
-          </a:ln>
-        </p:spPr>
-        <p:style>
-          <a:lnRef idx="1">
-            <a:schemeClr val="accent1"/>
-          </a:lnRef>
-          <a:fillRef idx="3">
-            <a:schemeClr val="accent1"/>
-          </a:fillRef>
-          <a:effectRef idx="2">
-            <a:schemeClr val="accent1"/>
-          </a:effectRef>
-          <a:fontRef idx="minor">
-            <a:schemeClr val="lt1"/>
-          </a:fontRef>
-        </p:style>
-        <p:txBody>
-          <a:bodyPr rtlCol="0" anchor="ctr" wrap="square"/>
-          <a:lstStyle/>
-          <a:p>
-            <a:pPr algn="ctr"/>
-            <a:r>
-              <a:rPr sz="2000" b="1">
-                <a:solidFill>
-                  <a:srgbClr val="FFFFFF"/>
-                </a:solidFill>
-                <a:latin typeface="Verdana"/>
-                <a:ea typeface="Verdana"/>
-                <a:cs typeface="Verdana"/>
-              </a:rPr>
-              <a:t>30</a:t>
-            </a:r>
-          </a:p>
-        </p:txBody>
-      </p:sp>
-      <p:sp>
-        <p:nvSpPr>
-          <p:cNvPr id="20" name="Rounded Rectangle 19">
-            <a:hlinkClick action="ppaction://hlinksldjump" r:id="rId9"/>
-          </p:cNvPr>
-          <p:cNvSpPr/>
-          <p:nvPr/>
-        </p:nvSpPr>
-        <p:spPr>
-          <a:xfrm>
-            <a:off x="6409944" y="3328416"/>
-            <a:ext cx="1554480" cy="777240"/>
-          </a:xfrm>
-          <a:prstGeom prst="roundRect">
-            <a:avLst>
-              <a:gd name="adj" fmla="val 12000"/>
-            </a:avLst>
-          </a:prstGeom>
-          <a:solidFill>
-            <a:srgbClr val="3F3F3F"/>
-          </a:solidFill>
-          <a:ln>
-            <a:noFill/>
-          </a:ln>
-        </p:spPr>
-        <p:style>
-          <a:lnRef idx="1">
-            <a:schemeClr val="accent1"/>
-          </a:lnRef>
-          <a:fillRef idx="3">
-            <a:schemeClr val="accent1"/>
-          </a:fillRef>
-          <a:effectRef idx="2">
-            <a:schemeClr val="accent1"/>
-          </a:effectRef>
-          <a:fontRef idx="minor">
-            <a:schemeClr val="lt1"/>
-          </a:fontRef>
-        </p:style>
-        <p:txBody>
-          <a:bodyPr rtlCol="0" anchor="ctr" wrap="square"/>
-          <a:lstStyle/>
-          <a:p>
-            <a:pPr algn="ctr"/>
-            <a:r>
-              <a:rPr sz="2000" b="1">
-                <a:solidFill>
-                  <a:srgbClr val="FFFFFF"/>
-                </a:solidFill>
-                <a:latin typeface="Verdana"/>
-                <a:ea typeface="Verdana"/>
-                <a:cs typeface="Verdana"/>
-              </a:rPr>
-              <a:t>50</a:t>
-            </a:r>
-          </a:p>
-        </p:txBody>
-      </p:sp>
-      <p:sp>
-        <p:nvSpPr>
-          <p:cNvPr id="21" name="Rounded Rectangle 20">
-            <a:hlinkClick action="ppaction://hlinksldjump" r:id="rId10"/>
-          </p:cNvPr>
-          <p:cNvSpPr/>
-          <p:nvPr/>
-        </p:nvSpPr>
-        <p:spPr>
-          <a:xfrm>
-            <a:off x="8074152" y="3328416"/>
-            <a:ext cx="1554480" cy="777240"/>
-          </a:xfrm>
-          <a:prstGeom prst="roundRect">
-            <a:avLst>
-              <a:gd name="adj" fmla="val 12000"/>
-            </a:avLst>
-          </a:prstGeom>
-          <a:solidFill>
-            <a:srgbClr val="3F3F3F"/>
-          </a:solidFill>
-          <a:ln>
-            <a:noFill/>
-          </a:ln>
-        </p:spPr>
-        <p:style>
-          <a:lnRef idx="1">
-            <a:schemeClr val="accent1"/>
-          </a:lnRef>
-          <a:fillRef idx="3">
-            <a:schemeClr val="accent1"/>
-          </a:fillRef>
-          <a:effectRef idx="2">
-            <a:schemeClr val="accent1"/>
-          </a:effectRef>
-          <a:fontRef idx="minor">
-            <a:schemeClr val="lt1"/>
-          </a:fontRef>
-        </p:style>
-        <p:txBody>
-          <a:bodyPr rtlCol="0" anchor="ctr" wrap="square"/>
-          <a:lstStyle/>
-          <a:p>
-            <a:pPr algn="ctr"/>
-            <a:r>
-              <a:rPr sz="2000" b="1">
-                <a:solidFill>
-                  <a:srgbClr val="FFFFFF"/>
-                </a:solidFill>
-                <a:latin typeface="Verdana"/>
-                <a:ea typeface="Verdana"/>
-                <a:cs typeface="Verdana"/>
-              </a:rPr>
-              <a:t>70</a:t>
-            </a:r>
-          </a:p>
-        </p:txBody>
-      </p:sp>
-      <p:sp>
-        <p:nvSpPr>
-          <p:cNvPr id="22" name="Rounded Rectangle 21">
-            <a:hlinkClick action="ppaction://hlinksldjump" r:id="rId11"/>
-          </p:cNvPr>
-          <p:cNvSpPr/>
-          <p:nvPr/>
-        </p:nvSpPr>
-        <p:spPr>
-          <a:xfrm>
-            <a:off x="9738360" y="3328416"/>
-            <a:ext cx="1554480" cy="777240"/>
-          </a:xfrm>
-          <a:prstGeom prst="roundRect">
-            <a:avLst>
-              <a:gd name="adj" fmla="val 12000"/>
-            </a:avLst>
-          </a:prstGeom>
-          <a:solidFill>
-            <a:srgbClr val="F0B42E"/>
-          </a:solidFill>
-          <a:ln>
-            <a:noFill/>
-          </a:ln>
-        </p:spPr>
-        <p:style>
-          <a:lnRef idx="1">
-            <a:schemeClr val="accent1"/>
-          </a:lnRef>
-          <a:fillRef idx="3">
-            <a:schemeClr val="accent1"/>
-          </a:fillRef>
-          <a:effectRef idx="2">
-            <a:schemeClr val="accent1"/>
-          </a:effectRef>
-          <a:fontRef idx="minor">
-            <a:schemeClr val="lt1"/>
-          </a:fontRef>
-        </p:style>
-        <p:txBody>
-          <a:bodyPr rtlCol="0" anchor="ctr" wrap="square"/>
-          <a:lstStyle/>
-          <a:p>
-            <a:pPr algn="ctr"/>
-            <a:r>
-              <a:rPr sz="2000" b="1">
-                <a:solidFill>
-                  <a:srgbClr val="1A1A1A"/>
-                </a:solidFill>
-                <a:latin typeface="Verdana"/>
-                <a:ea typeface="Verdana"/>
-                <a:cs typeface="Verdana"/>
-              </a:rPr>
-              <a:t>100</a:t>
-            </a:r>
-          </a:p>
-        </p:txBody>
-      </p:sp>
-      <p:sp>
-        <p:nvSpPr>
-          <p:cNvPr id="23" name="Rounded Rectangle 22"/>
-          <p:cNvSpPr/>
-          <p:nvPr/>
-        </p:nvSpPr>
-        <p:spPr>
-          <a:xfrm>
-            <a:off x="640080" y="4215384"/>
-            <a:ext cx="2331720" cy="777240"/>
-          </a:xfrm>
-          <a:prstGeom prst="roundRect">
-            <a:avLst>
-              <a:gd name="adj" fmla="val 8000"/>
-            </a:avLst>
-          </a:prstGeom>
-          <a:solidFill>
-            <a:srgbClr val="3F3F3F"/>
-          </a:solidFill>
-          <a:ln>
-            <a:noFill/>
-          </a:ln>
-        </p:spPr>
-        <p:style>
-          <a:lnRef idx="1">
-            <a:schemeClr val="accent1"/>
-          </a:lnRef>
-          <a:fillRef idx="3">
-            <a:schemeClr val="accent1"/>
-          </a:fillRef>
-          <a:effectRef idx="2">
-            <a:schemeClr val="accent1"/>
-          </a:effectRef>
-          <a:fontRef idx="minor">
-            <a:schemeClr val="lt1"/>
-          </a:fontRef>
-        </p:style>
-        <p:txBody>
-          <a:bodyPr rtlCol="0" anchor="ctr" wrap="square"/>
-          <a:lstStyle/>
-          <a:p>
-            <a:pPr algn="ctr"/>
-            <a:r>
-              <a:rPr sz="1200" b="1">
-                <a:solidFill>
-                  <a:srgbClr val="FFFFFF"/>
-                </a:solidFill>
-                <a:latin typeface="Verdana"/>
-                <a:ea typeface="Verdana"/>
-                <a:cs typeface="Verdana"/>
-              </a:rPr>
-              <a:t>Документы и QR</a:t>
-            </a:r>
-          </a:p>
-        </p:txBody>
-      </p:sp>
-      <p:sp>
-        <p:nvSpPr>
-          <p:cNvPr id="24" name="Rounded Rectangle 23">
-            <a:hlinkClick action="ppaction://hlinksldjump" r:id="rId12"/>
-          </p:cNvPr>
-          <p:cNvSpPr/>
-          <p:nvPr/>
-        </p:nvSpPr>
-        <p:spPr>
-          <a:xfrm>
-            <a:off x="3081528" y="4215384"/>
-            <a:ext cx="1554480" cy="777240"/>
-          </a:xfrm>
-          <a:prstGeom prst="roundRect">
-            <a:avLst>
-              <a:gd name="adj" fmla="val 12000"/>
-            </a:avLst>
-          </a:prstGeom>
-          <a:solidFill>
-            <a:srgbClr val="3F3F3F"/>
-          </a:solidFill>
-          <a:ln>
-            <a:noFill/>
-          </a:ln>
-        </p:spPr>
-        <p:style>
-          <a:lnRef idx="1">
-            <a:schemeClr val="accent1"/>
-          </a:lnRef>
-          <a:fillRef idx="3">
-            <a:schemeClr val="accent1"/>
-          </a:fillRef>
-          <a:effectRef idx="2">
-            <a:schemeClr val="accent1"/>
-          </a:effectRef>
-          <a:fontRef idx="minor">
-            <a:schemeClr val="lt1"/>
-          </a:fontRef>
-        </p:style>
-        <p:txBody>
-          <a:bodyPr rtlCol="0" anchor="ctr" wrap="square"/>
-          <a:lstStyle/>
-          <a:p>
-            <a:pPr algn="ctr"/>
-            <a:r>
-              <a:rPr sz="2000" b="1">
-                <a:solidFill>
-                  <a:srgbClr val="FFFFFF"/>
-                </a:solidFill>
-                <a:latin typeface="Verdana"/>
-                <a:ea typeface="Verdana"/>
-                <a:cs typeface="Verdana"/>
-              </a:rPr>
-              <a:t>10</a:t>
-            </a:r>
-          </a:p>
-        </p:txBody>
-      </p:sp>
-      <p:sp>
-        <p:nvSpPr>
-          <p:cNvPr id="25" name="Rounded Rectangle 24">
-            <a:hlinkClick action="ppaction://hlinksldjump" r:id="rId13"/>
-          </p:cNvPr>
-          <p:cNvSpPr/>
-          <p:nvPr/>
-        </p:nvSpPr>
-        <p:spPr>
-          <a:xfrm>
-            <a:off x="4745736" y="4215384"/>
-            <a:ext cx="1554480" cy="777240"/>
-          </a:xfrm>
-          <a:prstGeom prst="roundRect">
-            <a:avLst>
-              <a:gd name="adj" fmla="val 12000"/>
-            </a:avLst>
-          </a:prstGeom>
-          <a:solidFill>
-            <a:srgbClr val="3F3F3F"/>
-          </a:solidFill>
-          <a:ln>
-            <a:noFill/>
-          </a:ln>
-        </p:spPr>
-        <p:style>
-          <a:lnRef idx="1">
-            <a:schemeClr val="accent1"/>
-          </a:lnRef>
-          <a:fillRef idx="3">
-            <a:schemeClr val="accent1"/>
-          </a:fillRef>
-          <a:effectRef idx="2">
-            <a:schemeClr val="accent1"/>
-          </a:effectRef>
-          <a:fontRef idx="minor">
-            <a:schemeClr val="lt1"/>
-          </a:fontRef>
-        </p:style>
-        <p:txBody>
-          <a:bodyPr rtlCol="0" anchor="ctr" wrap="square"/>
-          <a:lstStyle/>
-          <a:p>
-            <a:pPr algn="ctr"/>
-            <a:r>
-              <a:rPr sz="2000" b="1">
-                <a:solidFill>
-                  <a:srgbClr val="FFFFFF"/>
-                </a:solidFill>
-                <a:latin typeface="Verdana"/>
-                <a:ea typeface="Verdana"/>
-                <a:cs typeface="Verdana"/>
-              </a:rPr>
-              <a:t>30</a:t>
-            </a:r>
-          </a:p>
-        </p:txBody>
-      </p:sp>
-      <p:sp>
-        <p:nvSpPr>
-          <p:cNvPr id="26" name="Rounded Rectangle 25">
-            <a:hlinkClick action="ppaction://hlinksldjump" r:id="rId14"/>
-          </p:cNvPr>
-          <p:cNvSpPr/>
-          <p:nvPr/>
-        </p:nvSpPr>
-        <p:spPr>
-          <a:xfrm>
-            <a:off x="6409944" y="4215384"/>
-            <a:ext cx="1554480" cy="777240"/>
-          </a:xfrm>
-          <a:prstGeom prst="roundRect">
-            <a:avLst>
-              <a:gd name="adj" fmla="val 12000"/>
-            </a:avLst>
-          </a:prstGeom>
-          <a:solidFill>
-            <a:srgbClr val="3F3F3F"/>
-          </a:solidFill>
-          <a:ln>
-            <a:noFill/>
-          </a:ln>
-        </p:spPr>
-        <p:style>
-          <a:lnRef idx="1">
-            <a:schemeClr val="accent1"/>
-          </a:lnRef>
-          <a:fillRef idx="3">
-            <a:schemeClr val="accent1"/>
-          </a:fillRef>
-          <a:effectRef idx="2">
-            <a:schemeClr val="accent1"/>
-          </a:effectRef>
-          <a:fontRef idx="minor">
-            <a:schemeClr val="lt1"/>
-          </a:fontRef>
-        </p:style>
-        <p:txBody>
-          <a:bodyPr rtlCol="0" anchor="ctr" wrap="square"/>
-          <a:lstStyle/>
-          <a:p>
-            <a:pPr algn="ctr"/>
-            <a:r>
-              <a:rPr sz="2000" b="1">
-                <a:solidFill>
-                  <a:srgbClr val="FFFFFF"/>
-                </a:solidFill>
-                <a:latin typeface="Verdana"/>
-                <a:ea typeface="Verdana"/>
-                <a:cs typeface="Verdana"/>
-              </a:rPr>
-              <a:t>50</a:t>
-            </a:r>
-          </a:p>
-        </p:txBody>
-      </p:sp>
-      <p:sp>
-        <p:nvSpPr>
-          <p:cNvPr id="27" name="Rounded Rectangle 26">
-            <a:hlinkClick action="ppaction://hlinksldjump" r:id="rId15"/>
-          </p:cNvPr>
-          <p:cNvSpPr/>
-          <p:nvPr/>
-        </p:nvSpPr>
-        <p:spPr>
-          <a:xfrm>
-            <a:off x="8074152" y="4215384"/>
-            <a:ext cx="1554480" cy="777240"/>
-          </a:xfrm>
-          <a:prstGeom prst="roundRect">
-            <a:avLst>
-              <a:gd name="adj" fmla="val 12000"/>
-            </a:avLst>
-          </a:prstGeom>
-          <a:solidFill>
-            <a:srgbClr val="3F3F3F"/>
-          </a:solidFill>
-          <a:ln>
-            <a:noFill/>
-          </a:ln>
-        </p:spPr>
-        <p:style>
-          <a:lnRef idx="1">
-            <a:schemeClr val="accent1"/>
-          </a:lnRef>
-          <a:fillRef idx="3">
-            <a:schemeClr val="accent1"/>
-          </a:fillRef>
-          <a:effectRef idx="2">
-            <a:schemeClr val="accent1"/>
-          </a:effectRef>
-          <a:fontRef idx="minor">
-            <a:schemeClr val="lt1"/>
-          </a:fontRef>
-        </p:style>
-        <p:txBody>
-          <a:bodyPr rtlCol="0" anchor="ctr" wrap="square"/>
-          <a:lstStyle/>
-          <a:p>
-            <a:pPr algn="ctr"/>
-            <a:r>
-              <a:rPr sz="2000" b="1">
-                <a:solidFill>
-                  <a:srgbClr val="FFFFFF"/>
-                </a:solidFill>
-                <a:latin typeface="Verdana"/>
-                <a:ea typeface="Verdana"/>
-                <a:cs typeface="Verdana"/>
-              </a:rPr>
-              <a:t>70</a:t>
-            </a:r>
-          </a:p>
-        </p:txBody>
-      </p:sp>
-      <p:sp>
-        <p:nvSpPr>
-          <p:cNvPr id="28" name="Rounded Rectangle 27">
-            <a:hlinkClick action="ppaction://hlinksldjump" r:id="rId16"/>
-          </p:cNvPr>
-          <p:cNvSpPr/>
-          <p:nvPr/>
-        </p:nvSpPr>
-        <p:spPr>
-          <a:xfrm>
-            <a:off x="9738360" y="4215384"/>
-            <a:ext cx="1554480" cy="777240"/>
-          </a:xfrm>
-          <a:prstGeom prst="roundRect">
-            <a:avLst>
-              <a:gd name="adj" fmla="val 12000"/>
-            </a:avLst>
-          </a:prstGeom>
-          <a:solidFill>
-            <a:srgbClr val="F0B42E"/>
-          </a:solidFill>
-          <a:ln>
-            <a:noFill/>
-          </a:ln>
-        </p:spPr>
-        <p:style>
-          <a:lnRef idx="1">
-            <a:schemeClr val="accent1"/>
-          </a:lnRef>
-          <a:fillRef idx="3">
-            <a:schemeClr val="accent1"/>
-          </a:fillRef>
-          <a:effectRef idx="2">
-            <a:schemeClr val="accent1"/>
-          </a:effectRef>
-          <a:fontRef idx="minor">
-            <a:schemeClr val="lt1"/>
-          </a:fontRef>
-        </p:style>
-        <p:txBody>
-          <a:bodyPr rtlCol="0" anchor="ctr" wrap="square"/>
-          <a:lstStyle/>
-          <a:p>
-            <a:pPr algn="ctr"/>
-            <a:r>
-              <a:rPr sz="2000" b="1">
-                <a:solidFill>
-                  <a:srgbClr val="1A1A1A"/>
-                </a:solidFill>
-                <a:latin typeface="Verdana"/>
-                <a:ea typeface="Verdana"/>
-                <a:cs typeface="Verdana"/>
-              </a:rPr>
-              <a:t>100</a:t>
-            </a:r>
-          </a:p>
-        </p:txBody>
-      </p:sp>
-      <p:sp>
-        <p:nvSpPr>
-          <p:cNvPr id="29" name="Rounded Rectangle 28"/>
-          <p:cNvSpPr/>
-          <p:nvPr/>
-        </p:nvSpPr>
-        <p:spPr>
-          <a:xfrm>
-            <a:off x="640080" y="5102352"/>
-            <a:ext cx="2331720" cy="777240"/>
-          </a:xfrm>
-          <a:prstGeom prst="roundRect">
-            <a:avLst>
-              <a:gd name="adj" fmla="val 8000"/>
-            </a:avLst>
-          </a:prstGeom>
-          <a:solidFill>
-            <a:srgbClr val="3F3F3F"/>
-          </a:solidFill>
-          <a:ln>
-            <a:noFill/>
-          </a:ln>
-        </p:spPr>
-        <p:style>
-          <a:lnRef idx="1">
-            <a:schemeClr val="accent1"/>
-          </a:lnRef>
-          <a:fillRef idx="3">
-            <a:schemeClr val="accent1"/>
-          </a:fillRef>
-          <a:effectRef idx="2">
-            <a:schemeClr val="accent1"/>
-          </a:effectRef>
-          <a:fontRef idx="minor">
-            <a:schemeClr val="lt1"/>
-          </a:fontRef>
-        </p:style>
-        <p:txBody>
-          <a:bodyPr rtlCol="0" anchor="ctr" wrap="square"/>
-          <a:lstStyle/>
-          <a:p>
-            <a:pPr algn="ctr"/>
-            <a:r>
-              <a:rPr sz="1200" b="1">
-                <a:solidFill>
-                  <a:srgbClr val="FFFFFF"/>
-                </a:solidFill>
-                <a:latin typeface="Verdana"/>
-                <a:ea typeface="Verdana"/>
-                <a:cs typeface="Verdana"/>
-              </a:rPr>
-              <a:t>Экспедиция и процесс</a:t>
-            </a:r>
-          </a:p>
-        </p:txBody>
-      </p:sp>
-      <p:sp>
-        <p:nvSpPr>
-          <p:cNvPr id="30" name="Rounded Rectangle 29">
-            <a:hlinkClick action="ppaction://hlinksldjump" r:id="rId17"/>
-          </p:cNvPr>
-          <p:cNvSpPr/>
-          <p:nvPr/>
-        </p:nvSpPr>
-        <p:spPr>
-          <a:xfrm>
-            <a:off x="3081528" y="5102352"/>
-            <a:ext cx="1554480" cy="777240"/>
-          </a:xfrm>
-          <a:prstGeom prst="roundRect">
-            <a:avLst>
-              <a:gd name="adj" fmla="val 12000"/>
-            </a:avLst>
-          </a:prstGeom>
-          <a:solidFill>
-            <a:srgbClr val="3F3F3F"/>
-          </a:solidFill>
-          <a:ln>
-            <a:noFill/>
-          </a:ln>
-        </p:spPr>
-        <p:style>
-          <a:lnRef idx="1">
-            <a:schemeClr val="accent1"/>
-          </a:lnRef>
-          <a:fillRef idx="3">
-            <a:schemeClr val="accent1"/>
-          </a:fillRef>
-          <a:effectRef idx="2">
-            <a:schemeClr val="accent1"/>
-          </a:effectRef>
-          <a:fontRef idx="minor">
-            <a:schemeClr val="lt1"/>
-          </a:fontRef>
-        </p:style>
-        <p:txBody>
-          <a:bodyPr rtlCol="0" anchor="ctr" wrap="square"/>
-          <a:lstStyle/>
-          <a:p>
-            <a:pPr algn="ctr"/>
-            <a:r>
-              <a:rPr sz="2000" b="1">
-                <a:solidFill>
-                  <a:srgbClr val="FFFFFF"/>
-                </a:solidFill>
-                <a:latin typeface="Verdana"/>
-                <a:ea typeface="Verdana"/>
-                <a:cs typeface="Verdana"/>
-              </a:rPr>
-              <a:t>10</a:t>
-            </a:r>
-          </a:p>
-        </p:txBody>
-      </p:sp>
-      <p:sp>
-        <p:nvSpPr>
-          <p:cNvPr id="31" name="Rounded Rectangle 30">
-            <a:hlinkClick action="ppaction://hlinksldjump" r:id="rId18"/>
-          </p:cNvPr>
-          <p:cNvSpPr/>
-          <p:nvPr/>
-        </p:nvSpPr>
-        <p:spPr>
-          <a:xfrm>
-            <a:off x="4745736" y="5102352"/>
-            <a:ext cx="1554480" cy="777240"/>
-          </a:xfrm>
-          <a:prstGeom prst="roundRect">
-            <a:avLst>
-              <a:gd name="adj" fmla="val 12000"/>
-            </a:avLst>
-          </a:prstGeom>
-          <a:solidFill>
-            <a:srgbClr val="3F3F3F"/>
-          </a:solidFill>
-          <a:ln>
-            <a:noFill/>
-          </a:ln>
-        </p:spPr>
-        <p:style>
-          <a:lnRef idx="1">
-            <a:schemeClr val="accent1"/>
-          </a:lnRef>
-          <a:fillRef idx="3">
-            <a:schemeClr val="accent1"/>
-          </a:fillRef>
-          <a:effectRef idx="2">
-            <a:schemeClr val="accent1"/>
-          </a:effectRef>
-          <a:fontRef idx="minor">
-            <a:schemeClr val="lt1"/>
-          </a:fontRef>
-        </p:style>
-        <p:txBody>
-          <a:bodyPr rtlCol="0" anchor="ctr" wrap="square"/>
-          <a:lstStyle/>
-          <a:p>
-            <a:pPr algn="ctr"/>
-            <a:r>
-              <a:rPr sz="2000" b="1">
-                <a:solidFill>
-                  <a:srgbClr val="FFFFFF"/>
-                </a:solidFill>
-                <a:latin typeface="Verdana"/>
-                <a:ea typeface="Verdana"/>
-                <a:cs typeface="Verdana"/>
-              </a:rPr>
-              <a:t>30</a:t>
-            </a:r>
-          </a:p>
-        </p:txBody>
-      </p:sp>
-      <p:sp>
-        <p:nvSpPr>
-          <p:cNvPr id="32" name="Rounded Rectangle 31">
-            <a:hlinkClick action="ppaction://hlinksldjump" r:id="rId19"/>
-          </p:cNvPr>
-          <p:cNvSpPr/>
-          <p:nvPr/>
-        </p:nvSpPr>
-        <p:spPr>
-          <a:xfrm>
-            <a:off x="6409944" y="5102352"/>
-            <a:ext cx="1554480" cy="777240"/>
-          </a:xfrm>
-          <a:prstGeom prst="roundRect">
-            <a:avLst>
-              <a:gd name="adj" fmla="val 12000"/>
-            </a:avLst>
-          </a:prstGeom>
-          <a:solidFill>
-            <a:srgbClr val="3F3F3F"/>
-          </a:solidFill>
-          <a:ln>
-            <a:noFill/>
-          </a:ln>
-        </p:spPr>
-        <p:style>
-          <a:lnRef idx="1">
-            <a:schemeClr val="accent1"/>
-          </a:lnRef>
-          <a:fillRef idx="3">
-            <a:schemeClr val="accent1"/>
-          </a:fillRef>
-          <a:effectRef idx="2">
-            <a:schemeClr val="accent1"/>
-          </a:effectRef>
-          <a:fontRef idx="minor">
-            <a:schemeClr val="lt1"/>
-          </a:fontRef>
-        </p:style>
-        <p:txBody>
-          <a:bodyPr rtlCol="0" anchor="ctr" wrap="square"/>
-          <a:lstStyle/>
-          <a:p>
-            <a:pPr algn="ctr"/>
-            <a:r>
-              <a:rPr sz="2000" b="1">
-                <a:solidFill>
-                  <a:srgbClr val="FFFFFF"/>
-                </a:solidFill>
-                <a:latin typeface="Verdana"/>
-                <a:ea typeface="Verdana"/>
-                <a:cs typeface="Verdana"/>
-              </a:rPr>
-              <a:t>50</a:t>
-            </a:r>
-          </a:p>
-        </p:txBody>
-      </p:sp>
-      <p:sp>
-        <p:nvSpPr>
-          <p:cNvPr id="33" name="Rounded Rectangle 32">
-            <a:hlinkClick action="ppaction://hlinksldjump" r:id="rId20"/>
-          </p:cNvPr>
-          <p:cNvSpPr/>
-          <p:nvPr/>
-        </p:nvSpPr>
-        <p:spPr>
-          <a:xfrm>
-            <a:off x="8074152" y="5102352"/>
-            <a:ext cx="1554480" cy="777240"/>
-          </a:xfrm>
-          <a:prstGeom prst="roundRect">
-            <a:avLst>
-              <a:gd name="adj" fmla="val 12000"/>
-            </a:avLst>
-          </a:prstGeom>
-          <a:solidFill>
-            <a:srgbClr val="3F3F3F"/>
-          </a:solidFill>
-          <a:ln>
-            <a:noFill/>
-          </a:ln>
-        </p:spPr>
-        <p:style>
-          <a:lnRef idx="1">
-            <a:schemeClr val="accent1"/>
-          </a:lnRef>
-          <a:fillRef idx="3">
-            <a:schemeClr val="accent1"/>
-          </a:fillRef>
-          <a:effectRef idx="2">
-            <a:schemeClr val="accent1"/>
-          </a:effectRef>
-          <a:fontRef idx="minor">
-            <a:schemeClr val="lt1"/>
-          </a:fontRef>
-        </p:style>
-        <p:txBody>
-          <a:bodyPr rtlCol="0" anchor="ctr" wrap="square"/>
-          <a:lstStyle/>
-          <a:p>
-            <a:pPr algn="ctr"/>
-            <a:r>
-              <a:rPr sz="2000" b="1">
-                <a:solidFill>
-                  <a:srgbClr val="FFFFFF"/>
-                </a:solidFill>
-                <a:latin typeface="Verdana"/>
-                <a:ea typeface="Verdana"/>
-                <a:cs typeface="Verdana"/>
-              </a:rPr>
-              <a:t>70</a:t>
-            </a:r>
-          </a:p>
-        </p:txBody>
-      </p:sp>
-      <p:sp>
-        <p:nvSpPr>
-          <p:cNvPr id="34" name="Rounded Rectangle 33">
-            <a:hlinkClick action="ppaction://hlinksldjump" r:id="rId21"/>
-          </p:cNvPr>
-          <p:cNvSpPr/>
-          <p:nvPr/>
-        </p:nvSpPr>
-        <p:spPr>
-          <a:xfrm>
-            <a:off x="9738360" y="5102352"/>
-            <a:ext cx="1554480" cy="777240"/>
-          </a:xfrm>
-          <a:prstGeom prst="roundRect">
-            <a:avLst>
-              <a:gd name="adj" fmla="val 12000"/>
-            </a:avLst>
-          </a:prstGeom>
-          <a:solidFill>
-            <a:srgbClr val="F0B42E"/>
-          </a:solidFill>
-          <a:ln>
-            <a:noFill/>
-          </a:ln>
-        </p:spPr>
-        <p:style>
-          <a:lnRef idx="1">
-            <a:schemeClr val="accent1"/>
-          </a:lnRef>
-          <a:fillRef idx="3">
-            <a:schemeClr val="accent1"/>
-          </a:fillRef>
-          <a:effectRef idx="2">
-            <a:schemeClr val="accent1"/>
-          </a:effectRef>
-          <a:fontRef idx="minor">
-            <a:schemeClr val="lt1"/>
-          </a:fontRef>
-        </p:style>
-        <p:txBody>
-          <a:bodyPr rtlCol="0" anchor="ctr" wrap="square"/>
-          <a:lstStyle/>
-          <a:p>
-            <a:pPr algn="ctr"/>
-            <a:r>
-              <a:rPr sz="2000" b="1">
-                <a:solidFill>
-                  <a:srgbClr val="1A1A1A"/>
-                </a:solidFill>
-                <a:latin typeface="Verdana"/>
-                <a:ea typeface="Verdana"/>
-                <a:cs typeface="Verdana"/>
-              </a:rPr>
-              <a:t>100</a:t>
-            </a:r>
-          </a:p>
-        </p:txBody>
-      </p:sp>
-      <p:sp>
-        <p:nvSpPr>
-          <p:cNvPr id="35" name="Rounded Rectangle 34"/>
-          <p:cNvSpPr/>
-          <p:nvPr/>
-        </p:nvSpPr>
-        <p:spPr>
-          <a:xfrm>
-            <a:off x="640080" y="5989320"/>
-            <a:ext cx="2331720" cy="777240"/>
-          </a:xfrm>
-          <a:prstGeom prst="roundRect">
-            <a:avLst>
-              <a:gd name="adj" fmla="val 8000"/>
-            </a:avLst>
-          </a:prstGeom>
-          <a:solidFill>
-            <a:srgbClr val="3F3F3F"/>
-          </a:solidFill>
-          <a:ln>
-            <a:noFill/>
-          </a:ln>
-        </p:spPr>
-        <p:style>
-          <a:lnRef idx="1">
-            <a:schemeClr val="accent1"/>
-          </a:lnRef>
-          <a:fillRef idx="3">
-            <a:schemeClr val="accent1"/>
-          </a:fillRef>
-          <a:effectRef idx="2">
-            <a:schemeClr val="accent1"/>
-          </a:effectRef>
-          <a:fontRef idx="minor">
-            <a:schemeClr val="lt1"/>
-          </a:fontRef>
-        </p:style>
-        <p:txBody>
-          <a:bodyPr rtlCol="0" anchor="ctr" wrap="square"/>
-          <a:lstStyle/>
-          <a:p>
-            <a:pPr algn="ctr"/>
-            <a:r>
-              <a:rPr sz="1200" b="1">
-                <a:solidFill>
-                  <a:srgbClr val="FFFFFF"/>
-                </a:solidFill>
-                <a:latin typeface="Verdana"/>
-                <a:ea typeface="Verdana"/>
-                <a:cs typeface="Verdana"/>
-              </a:rPr>
-              <a:t>1С-ЭПД и Доки</a:t>
-            </a:r>
-          </a:p>
-        </p:txBody>
-      </p:sp>
-      <p:sp>
-        <p:nvSpPr>
-          <p:cNvPr id="36" name="Rounded Rectangle 35">
-            <a:hlinkClick action="ppaction://hlinksldjump" r:id="rId22"/>
-          </p:cNvPr>
-          <p:cNvSpPr/>
-          <p:nvPr/>
-        </p:nvSpPr>
-        <p:spPr>
-          <a:xfrm>
-            <a:off x="3081528" y="5989320"/>
-            <a:ext cx="1554480" cy="777240"/>
-          </a:xfrm>
-          <a:prstGeom prst="roundRect">
-            <a:avLst>
-              <a:gd name="adj" fmla="val 12000"/>
-            </a:avLst>
-          </a:prstGeom>
-          <a:solidFill>
-            <a:srgbClr val="3F3F3F"/>
-          </a:solidFill>
-          <a:ln>
-            <a:noFill/>
-          </a:ln>
-        </p:spPr>
-        <p:style>
-          <a:lnRef idx="1">
-            <a:schemeClr val="accent1"/>
-          </a:lnRef>
-          <a:fillRef idx="3">
-            <a:schemeClr val="accent1"/>
-          </a:fillRef>
-          <a:effectRef idx="2">
-            <a:schemeClr val="accent1"/>
-          </a:effectRef>
-          <a:fontRef idx="minor">
-            <a:schemeClr val="lt1"/>
-          </a:fontRef>
-        </p:style>
-        <p:txBody>
-          <a:bodyPr rtlCol="0" anchor="ctr" wrap="square"/>
-          <a:lstStyle/>
-          <a:p>
-            <a:pPr algn="ctr"/>
-            <a:r>
-              <a:rPr sz="2000" b="1">
-                <a:solidFill>
-                  <a:srgbClr val="FFFFFF"/>
-                </a:solidFill>
-                <a:latin typeface="Verdana"/>
-                <a:ea typeface="Verdana"/>
-                <a:cs typeface="Verdana"/>
-              </a:rPr>
-              <a:t>10</a:t>
-            </a:r>
-          </a:p>
-        </p:txBody>
-      </p:sp>
-      <p:sp>
-        <p:nvSpPr>
-          <p:cNvPr id="37" name="Rounded Rectangle 36">
-            <a:hlinkClick action="ppaction://hlinksldjump" r:id="rId23"/>
-          </p:cNvPr>
-          <p:cNvSpPr/>
-          <p:nvPr/>
-        </p:nvSpPr>
-        <p:spPr>
-          <a:xfrm>
-            <a:off x="4745736" y="5989320"/>
-            <a:ext cx="1554480" cy="777240"/>
-          </a:xfrm>
-          <a:prstGeom prst="roundRect">
-            <a:avLst>
-              <a:gd name="adj" fmla="val 12000"/>
-            </a:avLst>
-          </a:prstGeom>
-          <a:solidFill>
-            <a:srgbClr val="3F3F3F"/>
-          </a:solidFill>
-          <a:ln>
-            <a:noFill/>
-          </a:ln>
-        </p:spPr>
-        <p:style>
-          <a:lnRef idx="1">
-            <a:schemeClr val="accent1"/>
-          </a:lnRef>
-          <a:fillRef idx="3">
-            <a:schemeClr val="accent1"/>
-          </a:fillRef>
-          <a:effectRef idx="2">
-            <a:schemeClr val="accent1"/>
-          </a:effectRef>
-          <a:fontRef idx="minor">
-            <a:schemeClr val="lt1"/>
-          </a:fontRef>
-        </p:style>
-        <p:txBody>
-          <a:bodyPr rtlCol="0" anchor="ctr" wrap="square"/>
-          <a:lstStyle/>
-          <a:p>
-            <a:pPr algn="ctr"/>
-            <a:r>
-              <a:rPr sz="2000" b="1">
-                <a:solidFill>
-                  <a:srgbClr val="FFFFFF"/>
-                </a:solidFill>
-                <a:latin typeface="Verdana"/>
-                <a:ea typeface="Verdana"/>
-                <a:cs typeface="Verdana"/>
-              </a:rPr>
-              <a:t>30</a:t>
-            </a:r>
-          </a:p>
-        </p:txBody>
-      </p:sp>
-      <p:sp>
-        <p:nvSpPr>
-          <p:cNvPr id="38" name="Rounded Rectangle 37">
-            <a:hlinkClick action="ppaction://hlinksldjump" r:id="rId24"/>
-          </p:cNvPr>
-          <p:cNvSpPr/>
-          <p:nvPr/>
-        </p:nvSpPr>
-        <p:spPr>
-          <a:xfrm>
-            <a:off x="6409944" y="5989320"/>
-            <a:ext cx="1554480" cy="777240"/>
-          </a:xfrm>
-          <a:prstGeom prst="roundRect">
-            <a:avLst>
-              <a:gd name="adj" fmla="val 12000"/>
-            </a:avLst>
-          </a:prstGeom>
-          <a:solidFill>
-            <a:srgbClr val="3F3F3F"/>
-          </a:solidFill>
-          <a:ln>
-            <a:noFill/>
-          </a:ln>
-        </p:spPr>
-        <p:style>
-          <a:lnRef idx="1">
-            <a:schemeClr val="accent1"/>
-          </a:lnRef>
-          <a:fillRef idx="3">
-            <a:schemeClr val="accent1"/>
-          </a:fillRef>
-          <a:effectRef idx="2">
-            <a:schemeClr val="accent1"/>
-          </a:effectRef>
-          <a:fontRef idx="minor">
-            <a:schemeClr val="lt1"/>
-          </a:fontRef>
-        </p:style>
-        <p:txBody>
-          <a:bodyPr rtlCol="0" anchor="ctr" wrap="square"/>
-          <a:lstStyle/>
-          <a:p>
-            <a:pPr algn="ctr"/>
-            <a:r>
-              <a:rPr sz="2000" b="1">
-                <a:solidFill>
-                  <a:srgbClr val="FFFFFF"/>
-                </a:solidFill>
-                <a:latin typeface="Verdana"/>
-                <a:ea typeface="Verdana"/>
-                <a:cs typeface="Verdana"/>
-              </a:rPr>
-              <a:t>50</a:t>
-            </a:r>
-          </a:p>
-        </p:txBody>
-      </p:sp>
-      <p:sp>
-        <p:nvSpPr>
-          <p:cNvPr id="39" name="Rounded Rectangle 38">
-            <a:hlinkClick action="ppaction://hlinksldjump" r:id="rId25"/>
-          </p:cNvPr>
-          <p:cNvSpPr/>
-          <p:nvPr/>
-        </p:nvSpPr>
-        <p:spPr>
-          <a:xfrm>
-            <a:off x="8074152" y="5989320"/>
-            <a:ext cx="1554480" cy="777240"/>
-          </a:xfrm>
-          <a:prstGeom prst="roundRect">
-            <a:avLst>
-              <a:gd name="adj" fmla="val 12000"/>
-            </a:avLst>
-          </a:prstGeom>
-          <a:solidFill>
-            <a:srgbClr val="3F3F3F"/>
-          </a:solidFill>
-          <a:ln>
-            <a:noFill/>
-          </a:ln>
-        </p:spPr>
-        <p:style>
-          <a:lnRef idx="1">
-            <a:schemeClr val="accent1"/>
-          </a:lnRef>
-          <a:fillRef idx="3">
-            <a:schemeClr val="accent1"/>
-          </a:fillRef>
-          <a:effectRef idx="2">
-            <a:schemeClr val="accent1"/>
-          </a:effectRef>
-          <a:fontRef idx="minor">
-            <a:schemeClr val="lt1"/>
-          </a:fontRef>
-        </p:style>
-        <p:txBody>
-          <a:bodyPr rtlCol="0" anchor="ctr" wrap="square"/>
-          <a:lstStyle/>
-          <a:p>
-            <a:pPr algn="ctr"/>
-            <a:r>
-              <a:rPr sz="2000" b="1">
-                <a:solidFill>
-                  <a:srgbClr val="FFFFFF"/>
-                </a:solidFill>
-                <a:latin typeface="Verdana"/>
-                <a:ea typeface="Verdana"/>
-                <a:cs typeface="Verdana"/>
-              </a:rPr>
-              <a:t>70</a:t>
-            </a:r>
-          </a:p>
-        </p:txBody>
-      </p:sp>
-      <p:sp>
-        <p:nvSpPr>
-          <p:cNvPr id="40" name="Rounded Rectangle 39">
-            <a:hlinkClick action="ppaction://hlinksldjump" r:id="rId26"/>
-          </p:cNvPr>
-          <p:cNvSpPr/>
-          <p:nvPr/>
-        </p:nvSpPr>
-        <p:spPr>
-          <a:xfrm>
-            <a:off x="9738360" y="5989320"/>
-            <a:ext cx="1554480" cy="777240"/>
-          </a:xfrm>
-          <a:prstGeom prst="roundRect">
-            <a:avLst>
-              <a:gd name="adj" fmla="val 12000"/>
-            </a:avLst>
-          </a:prstGeom>
-          <a:solidFill>
-            <a:srgbClr val="F0B42E"/>
-          </a:solidFill>
-          <a:ln>
-            <a:noFill/>
-          </a:ln>
-        </p:spPr>
-        <p:style>
-          <a:lnRef idx="1">
-            <a:schemeClr val="accent1"/>
-          </a:lnRef>
-          <a:fillRef idx="3">
-            <a:schemeClr val="accent1"/>
-          </a:fillRef>
-          <a:effectRef idx="2">
-            <a:schemeClr val="accent1"/>
-          </a:effectRef>
-          <a:fontRef idx="minor">
-            <a:schemeClr val="lt1"/>
-          </a:fontRef>
-        </p:style>
-        <p:txBody>
-          <a:bodyPr rtlCol="0" anchor="ctr" wrap="square"/>
-          <a:lstStyle/>
-          <a:p>
-            <a:pPr algn="ctr"/>
-            <a:r>
-              <a:rPr sz="2000" b="1">
-                <a:solidFill>
-                  <a:srgbClr val="1A1A1A"/>
-                </a:solidFill>
-                <a:latin typeface="Verdana"/>
-                <a:ea typeface="Verdana"/>
-                <a:cs typeface="Verdana"/>
+              <a:rPr sz="2200" b="1">
+                <a:latin typeface="Verdana"/>
+                <a:ea typeface="Verdana"/>
+                <a:cs typeface="Verdana"/>
+                <a:solidFill>
+                  <a:schemeClr val="hlink"/>
+                </a:solidFill>
+                <a:hlinkClick r:id="rId26" action="ppaction://hlinksldjump"/>
               </a:rPr>
               <a:t>100</a:t>
             </a:r>
@@ -23616,10 +23641,10 @@
         <a:srgbClr val="BFBFBF"/>
       </a:accent6>
       <a:hlink>
-        <a:srgbClr val="26A6E0"/>
+        <a:srgbClr val="FFFFFF"/>
       </a:hlink>
       <a:folHlink>
-        <a:srgbClr val="BFBFBF"/>
+        <a:srgbClr val="C0392B"/>
       </a:folHlink>
     </a:clrScheme>
     <a:fontScheme name="Форус_2020">
@@ -23831,10 +23856,10 @@
         <a:srgbClr val="70AD47"/>
       </a:accent6>
       <a:hlink>
-        <a:srgbClr val="0563C1"/>
+        <a:srgbClr val="FFFFFF"/>
       </a:hlink>
       <a:folHlink>
-        <a:srgbClr val="954F72"/>
+        <a:srgbClr val="C0392B"/>
       </a:folHlink>
     </a:clrScheme>
     <a:fontScheme name="Стандартная">
@@ -24092,10 +24117,10 @@
         <a:srgbClr val="70AD47"/>
       </a:accent6>
       <a:hlink>
-        <a:srgbClr val="0563C1"/>
+        <a:srgbClr val="FFFFFF"/>
       </a:hlink>
       <a:folHlink>
-        <a:srgbClr val="954F72"/>
+        <a:srgbClr val="C0392B"/>
       </a:folHlink>
     </a:clrScheme>
     <a:fontScheme name="Стандартная">

--- a/квиз 1с-эпд/Квиз_1С-ЭПД_Доки_Логистика_100к1.pptx
+++ b/квиз 1с-эпд/Квиз_1С-ЭПД_Доки_Логистика_100к1.pptx
@@ -7176,24 +7176,21 @@
               <p:cTn id="2" dur="indefinite" nodeType="mainSeq">
                 <p:childTnLst>
                   <p:par>
-                    <p:cTn id="3" fill="hold" nodeType="clickPar">
+                    <p:cTn id="3" fill="hold">
                       <p:stCondLst>
-                        <p:cond delay="indefinite"/>
-                        <p:cond evt="onBegin" delay="0">
-                          <p:tn val="2"/>
-                        </p:cond>
+                        <p:cond delay="0"/>
                       </p:stCondLst>
                       <p:childTnLst>
                         <p:par>
-                          <p:cTn id="4" fill="hold" nodeType="afterGroup">
+                          <p:cTn id="4" fill="hold">
                             <p:stCondLst>
-                              <p:cond delay="0"/>
+                              <p:cond delay="30000"/>
                             </p:stCondLst>
                             <p:childTnLst>
                               <p:par>
-                                <p:cTn id="5" presetID="1" presetClass="entr" presetSubtype="0" fill="hold" grpId="0" nodeType="afterEffect">
+                                <p:cTn id="5" presetID="1" presetClass="entr" presetSubtype="0" fill="hold" grpId="0" nodeType="withEffect">
                                   <p:stCondLst>
-                                    <p:cond delay="40000"/>
+                                    <p:cond delay="0"/>
                                   </p:stCondLst>
                                   <p:childTnLst>
                                     <p:set>
@@ -7886,24 +7883,21 @@
               <p:cTn id="2" dur="indefinite" nodeType="mainSeq">
                 <p:childTnLst>
                   <p:par>
-                    <p:cTn id="3" fill="hold" nodeType="clickPar">
+                    <p:cTn id="3" fill="hold">
                       <p:stCondLst>
-                        <p:cond delay="indefinite"/>
-                        <p:cond evt="onBegin" delay="0">
-                          <p:tn val="2"/>
-                        </p:cond>
+                        <p:cond delay="0"/>
                       </p:stCondLst>
                       <p:childTnLst>
                         <p:par>
-                          <p:cTn id="4" fill="hold" nodeType="afterGroup">
+                          <p:cTn id="4" fill="hold">
                             <p:stCondLst>
-                              <p:cond delay="0"/>
+                              <p:cond delay="30000"/>
                             </p:stCondLst>
                             <p:childTnLst>
                               <p:par>
-                                <p:cTn id="5" presetID="1" presetClass="entr" presetSubtype="0" fill="hold" grpId="0" nodeType="afterEffect">
+                                <p:cTn id="5" presetID="1" presetClass="entr" presetSubtype="0" fill="hold" grpId="0" nodeType="withEffect">
                                   <p:stCondLst>
-                                    <p:cond delay="40000"/>
+                                    <p:cond delay="0"/>
                                   </p:stCondLst>
                                   <p:childTnLst>
                                     <p:set>
@@ -8596,24 +8590,21 @@
               <p:cTn id="2" dur="indefinite" nodeType="mainSeq">
                 <p:childTnLst>
                   <p:par>
-                    <p:cTn id="3" fill="hold" nodeType="clickPar">
+                    <p:cTn id="3" fill="hold">
                       <p:stCondLst>
-                        <p:cond delay="indefinite"/>
-                        <p:cond evt="onBegin" delay="0">
-                          <p:tn val="2"/>
-                        </p:cond>
+                        <p:cond delay="0"/>
                       </p:stCondLst>
                       <p:childTnLst>
                         <p:par>
-                          <p:cTn id="4" fill="hold" nodeType="afterGroup">
+                          <p:cTn id="4" fill="hold">
                             <p:stCondLst>
-                              <p:cond delay="0"/>
+                              <p:cond delay="30000"/>
                             </p:stCondLst>
                             <p:childTnLst>
                               <p:par>
-                                <p:cTn id="5" presetID="1" presetClass="entr" presetSubtype="0" fill="hold" grpId="0" nodeType="afterEffect">
+                                <p:cTn id="5" presetID="1" presetClass="entr" presetSubtype="0" fill="hold" grpId="0" nodeType="withEffect">
                                   <p:stCondLst>
-                                    <p:cond delay="40000"/>
+                                    <p:cond delay="0"/>
                                   </p:stCondLst>
                                   <p:childTnLst>
                                     <p:set>
@@ -9498,24 +9489,21 @@
               <p:cTn id="2" dur="indefinite" nodeType="mainSeq">
                 <p:childTnLst>
                   <p:par>
-                    <p:cTn id="3" fill="hold" nodeType="clickPar">
+                    <p:cTn id="3" fill="hold">
                       <p:stCondLst>
-                        <p:cond delay="indefinite"/>
-                        <p:cond evt="onBegin" delay="0">
-                          <p:tn val="2"/>
-                        </p:cond>
+                        <p:cond delay="0"/>
                       </p:stCondLst>
                       <p:childTnLst>
                         <p:par>
-                          <p:cTn id="4" fill="hold" nodeType="afterGroup">
+                          <p:cTn id="4" fill="hold">
                             <p:stCondLst>
-                              <p:cond delay="0"/>
+                              <p:cond delay="30000"/>
                             </p:stCondLst>
                             <p:childTnLst>
                               <p:par>
-                                <p:cTn id="5" presetID="1" presetClass="entr" presetSubtype="0" fill="hold" grpId="0" nodeType="afterEffect">
+                                <p:cTn id="5" presetID="1" presetClass="entr" presetSubtype="0" fill="hold" grpId="0" nodeType="withEffect">
                                   <p:stCondLst>
-                                    <p:cond delay="40000"/>
+                                    <p:cond delay="0"/>
                                   </p:stCondLst>
                                   <p:childTnLst>
                                     <p:set>
@@ -10208,24 +10196,21 @@
               <p:cTn id="2" dur="indefinite" nodeType="mainSeq">
                 <p:childTnLst>
                   <p:par>
-                    <p:cTn id="3" fill="hold" nodeType="clickPar">
+                    <p:cTn id="3" fill="hold">
                       <p:stCondLst>
-                        <p:cond delay="indefinite"/>
-                        <p:cond evt="onBegin" delay="0">
-                          <p:tn val="2"/>
-                        </p:cond>
+                        <p:cond delay="0"/>
                       </p:stCondLst>
                       <p:childTnLst>
                         <p:par>
-                          <p:cTn id="4" fill="hold" nodeType="afterGroup">
+                          <p:cTn id="4" fill="hold">
                             <p:stCondLst>
-                              <p:cond delay="0"/>
+                              <p:cond delay="30000"/>
                             </p:stCondLst>
                             <p:childTnLst>
                               <p:par>
-                                <p:cTn id="5" presetID="1" presetClass="entr" presetSubtype="0" fill="hold" grpId="0" nodeType="afterEffect">
+                                <p:cTn id="5" presetID="1" presetClass="entr" presetSubtype="0" fill="hold" grpId="0" nodeType="withEffect">
                                   <p:stCondLst>
-                                    <p:cond delay="40000"/>
+                                    <p:cond delay="0"/>
                                   </p:stCondLst>
                                   <p:childTnLst>
                                     <p:set>
@@ -11066,24 +11051,21 @@
               <p:cTn id="2" dur="indefinite" nodeType="mainSeq">
                 <p:childTnLst>
                   <p:par>
-                    <p:cTn id="3" fill="hold" nodeType="clickPar">
+                    <p:cTn id="3" fill="hold">
                       <p:stCondLst>
-                        <p:cond delay="indefinite"/>
-                        <p:cond evt="onBegin" delay="0">
-                          <p:tn val="2"/>
-                        </p:cond>
+                        <p:cond delay="0"/>
                       </p:stCondLst>
                       <p:childTnLst>
                         <p:par>
-                          <p:cTn id="4" fill="hold" nodeType="afterGroup">
+                          <p:cTn id="4" fill="hold">
                             <p:stCondLst>
-                              <p:cond delay="0"/>
+                              <p:cond delay="30000"/>
                             </p:stCondLst>
                             <p:childTnLst>
                               <p:par>
-                                <p:cTn id="5" presetID="1" presetClass="entr" presetSubtype="0" fill="hold" grpId="0" nodeType="afterEffect">
+                                <p:cTn id="5" presetID="1" presetClass="entr" presetSubtype="0" fill="hold" grpId="0" nodeType="withEffect">
                                   <p:stCondLst>
-                                    <p:cond delay="40000"/>
+                                    <p:cond delay="0"/>
                                   </p:stCondLst>
                                   <p:childTnLst>
                                     <p:set>
@@ -11795,24 +11777,21 @@
               <p:cTn id="2" dur="indefinite" nodeType="mainSeq">
                 <p:childTnLst>
                   <p:par>
-                    <p:cTn id="3" fill="hold" nodeType="clickPar">
+                    <p:cTn id="3" fill="hold">
                       <p:stCondLst>
-                        <p:cond delay="indefinite"/>
-                        <p:cond evt="onBegin" delay="0">
-                          <p:tn val="2"/>
-                        </p:cond>
+                        <p:cond delay="0"/>
                       </p:stCondLst>
                       <p:childTnLst>
                         <p:par>
-                          <p:cTn id="4" fill="hold" nodeType="afterGroup">
+                          <p:cTn id="4" fill="hold">
                             <p:stCondLst>
-                              <p:cond delay="0"/>
+                              <p:cond delay="30000"/>
                             </p:stCondLst>
                             <p:childTnLst>
                               <p:par>
-                                <p:cTn id="5" presetID="1" presetClass="entr" presetSubtype="0" fill="hold" grpId="0" nodeType="afterEffect">
+                                <p:cTn id="5" presetID="1" presetClass="entr" presetSubtype="0" fill="hold" grpId="0" nodeType="withEffect">
                                   <p:stCondLst>
-                                    <p:cond delay="40000"/>
+                                    <p:cond delay="0"/>
                                   </p:stCondLst>
                                   <p:childTnLst>
                                     <p:set>
@@ -12505,24 +12484,21 @@
               <p:cTn id="2" dur="indefinite" nodeType="mainSeq">
                 <p:childTnLst>
                   <p:par>
-                    <p:cTn id="3" fill="hold" nodeType="clickPar">
+                    <p:cTn id="3" fill="hold">
                       <p:stCondLst>
-                        <p:cond delay="indefinite"/>
-                        <p:cond evt="onBegin" delay="0">
-                          <p:tn val="2"/>
-                        </p:cond>
+                        <p:cond delay="0"/>
                       </p:stCondLst>
                       <p:childTnLst>
                         <p:par>
-                          <p:cTn id="4" fill="hold" nodeType="afterGroup">
+                          <p:cTn id="4" fill="hold">
                             <p:stCondLst>
-                              <p:cond delay="0"/>
+                              <p:cond delay="30000"/>
                             </p:stCondLst>
                             <p:childTnLst>
                               <p:par>
-                                <p:cTn id="5" presetID="1" presetClass="entr" presetSubtype="0" fill="hold" grpId="0" nodeType="afterEffect">
+                                <p:cTn id="5" presetID="1" presetClass="entr" presetSubtype="0" fill="hold" grpId="0" nodeType="withEffect">
                                   <p:stCondLst>
-                                    <p:cond delay="40000"/>
+                                    <p:cond delay="0"/>
                                   </p:stCondLst>
                                   <p:childTnLst>
                                     <p:set>
@@ -13230,24 +13206,21 @@
               <p:cTn id="2" dur="indefinite" nodeType="mainSeq">
                 <p:childTnLst>
                   <p:par>
-                    <p:cTn id="3" fill="hold" nodeType="clickPar">
+                    <p:cTn id="3" fill="hold">
                       <p:stCondLst>
-                        <p:cond delay="indefinite"/>
-                        <p:cond evt="onBegin" delay="0">
-                          <p:tn val="2"/>
-                        </p:cond>
+                        <p:cond delay="0"/>
                       </p:stCondLst>
                       <p:childTnLst>
                         <p:par>
-                          <p:cTn id="4" fill="hold" nodeType="afterGroup">
+                          <p:cTn id="4" fill="hold">
                             <p:stCondLst>
-                              <p:cond delay="0"/>
+                              <p:cond delay="30000"/>
                             </p:stCondLst>
                             <p:childTnLst>
                               <p:par>
-                                <p:cTn id="5" presetID="1" presetClass="entr" presetSubtype="0" fill="hold" grpId="0" nodeType="afterEffect">
+                                <p:cTn id="5" presetID="1" presetClass="entr" presetSubtype="0" fill="hold" grpId="0" nodeType="withEffect">
                                   <p:stCondLst>
-                                    <p:cond delay="40000"/>
+                                    <p:cond delay="0"/>
                                   </p:stCondLst>
                                   <p:childTnLst>
                                     <p:set>
@@ -13940,24 +13913,21 @@
               <p:cTn id="2" dur="indefinite" nodeType="mainSeq">
                 <p:childTnLst>
                   <p:par>
-                    <p:cTn id="3" fill="hold" nodeType="clickPar">
+                    <p:cTn id="3" fill="hold">
                       <p:stCondLst>
-                        <p:cond delay="indefinite"/>
-                        <p:cond evt="onBegin" delay="0">
-                          <p:tn val="2"/>
-                        </p:cond>
+                        <p:cond delay="0"/>
                       </p:stCondLst>
                       <p:childTnLst>
                         <p:par>
-                          <p:cTn id="4" fill="hold" nodeType="afterGroup">
+                          <p:cTn id="4" fill="hold">
                             <p:stCondLst>
-                              <p:cond delay="0"/>
+                              <p:cond delay="30000"/>
                             </p:stCondLst>
                             <p:childTnLst>
                               <p:par>
-                                <p:cTn id="5" presetID="1" presetClass="entr" presetSubtype="0" fill="hold" grpId="0" nodeType="afterEffect">
+                                <p:cTn id="5" presetID="1" presetClass="entr" presetSubtype="0" fill="hold" grpId="0" nodeType="withEffect">
                                   <p:stCondLst>
-                                    <p:cond delay="40000"/>
+                                    <p:cond delay="0"/>
                                   </p:stCondLst>
                                   <p:childTnLst>
                                     <p:set>
@@ -16952,24 +16922,21 @@
               <p:cTn id="2" dur="indefinite" nodeType="mainSeq">
                 <p:childTnLst>
                   <p:par>
-                    <p:cTn id="3" fill="hold" nodeType="clickPar">
+                    <p:cTn id="3" fill="hold">
                       <p:stCondLst>
-                        <p:cond delay="indefinite"/>
-                        <p:cond evt="onBegin" delay="0">
-                          <p:tn val="2"/>
-                        </p:cond>
+                        <p:cond delay="0"/>
                       </p:stCondLst>
                       <p:childTnLst>
                         <p:par>
-                          <p:cTn id="4" fill="hold" nodeType="afterGroup">
+                          <p:cTn id="4" fill="hold">
                             <p:stCondLst>
-                              <p:cond delay="0"/>
+                              <p:cond delay="30000"/>
                             </p:stCondLst>
                             <p:childTnLst>
                               <p:par>
-                                <p:cTn id="5" presetID="1" presetClass="entr" presetSubtype="0" fill="hold" grpId="0" nodeType="afterEffect">
+                                <p:cTn id="5" presetID="1" presetClass="entr" presetSubtype="0" fill="hold" grpId="0" nodeType="withEffect">
                                   <p:stCondLst>
-                                    <p:cond delay="40000"/>
+                                    <p:cond delay="0"/>
                                   </p:stCondLst>
                                   <p:childTnLst>
                                     <p:set>
@@ -17697,24 +17664,21 @@
               <p:cTn id="2" dur="indefinite" nodeType="mainSeq">
                 <p:childTnLst>
                   <p:par>
-                    <p:cTn id="3" fill="hold" nodeType="clickPar">
+                    <p:cTn id="3" fill="hold">
                       <p:stCondLst>
-                        <p:cond delay="indefinite"/>
-                        <p:cond evt="onBegin" delay="0">
-                          <p:tn val="2"/>
-                        </p:cond>
+                        <p:cond delay="0"/>
                       </p:stCondLst>
                       <p:childTnLst>
                         <p:par>
-                          <p:cTn id="4" fill="hold" nodeType="afterGroup">
+                          <p:cTn id="4" fill="hold">
                             <p:stCondLst>
-                              <p:cond delay="0"/>
+                              <p:cond delay="30000"/>
                             </p:stCondLst>
                             <p:childTnLst>
                               <p:par>
-                                <p:cTn id="5" presetID="1" presetClass="entr" presetSubtype="0" fill="hold" grpId="0" nodeType="afterEffect">
+                                <p:cTn id="5" presetID="1" presetClass="entr" presetSubtype="0" fill="hold" grpId="0" nodeType="withEffect">
                                   <p:stCondLst>
-                                    <p:cond delay="40000"/>
+                                    <p:cond delay="0"/>
                                   </p:stCondLst>
                                   <p:childTnLst>
                                     <p:set>
@@ -18539,24 +18503,21 @@
               <p:cTn id="2" dur="indefinite" nodeType="mainSeq">
                 <p:childTnLst>
                   <p:par>
-                    <p:cTn id="3" fill="hold" nodeType="clickPar">
+                    <p:cTn id="3" fill="hold">
                       <p:stCondLst>
-                        <p:cond delay="indefinite"/>
-                        <p:cond evt="onBegin" delay="0">
-                          <p:tn val="2"/>
-                        </p:cond>
+                        <p:cond delay="0"/>
                       </p:stCondLst>
                       <p:childTnLst>
                         <p:par>
-                          <p:cTn id="4" fill="hold" nodeType="afterGroup">
+                          <p:cTn id="4" fill="hold">
                             <p:stCondLst>
-                              <p:cond delay="0"/>
+                              <p:cond delay="30000"/>
                             </p:stCondLst>
                             <p:childTnLst>
                               <p:par>
-                                <p:cTn id="5" presetID="1" presetClass="entr" presetSubtype="0" fill="hold" grpId="0" nodeType="afterEffect">
+                                <p:cTn id="5" presetID="1" presetClass="entr" presetSubtype="0" fill="hold" grpId="0" nodeType="withEffect">
                                   <p:stCondLst>
-                                    <p:cond delay="40000"/>
+                                    <p:cond delay="0"/>
                                   </p:stCondLst>
                                   <p:childTnLst>
                                     <p:set>
@@ -19249,24 +19210,21 @@
               <p:cTn id="2" dur="indefinite" nodeType="mainSeq">
                 <p:childTnLst>
                   <p:par>
-                    <p:cTn id="3" fill="hold" nodeType="clickPar">
+                    <p:cTn id="3" fill="hold">
                       <p:stCondLst>
-                        <p:cond delay="indefinite"/>
-                        <p:cond evt="onBegin" delay="0">
-                          <p:tn val="2"/>
-                        </p:cond>
+                        <p:cond delay="0"/>
                       </p:stCondLst>
                       <p:childTnLst>
                         <p:par>
-                          <p:cTn id="4" fill="hold" nodeType="afterGroup">
+                          <p:cTn id="4" fill="hold">
                             <p:stCondLst>
-                              <p:cond delay="0"/>
+                              <p:cond delay="30000"/>
                             </p:stCondLst>
                             <p:childTnLst>
                               <p:par>
-                                <p:cTn id="5" presetID="1" presetClass="entr" presetSubtype="0" fill="hold" grpId="0" nodeType="afterEffect">
+                                <p:cTn id="5" presetID="1" presetClass="entr" presetSubtype="0" fill="hold" grpId="0" nodeType="withEffect">
                                   <p:stCondLst>
-                                    <p:cond delay="40000"/>
+                                    <p:cond delay="0"/>
                                   </p:stCondLst>
                                   <p:childTnLst>
                                     <p:set>
@@ -19863,24 +19821,21 @@
               <p:cTn id="2" dur="indefinite" nodeType="mainSeq">
                 <p:childTnLst>
                   <p:par>
-                    <p:cTn id="3" fill="hold" nodeType="clickPar">
+                    <p:cTn id="3" fill="hold">
                       <p:stCondLst>
-                        <p:cond delay="indefinite"/>
-                        <p:cond evt="onBegin" delay="0">
-                          <p:tn val="2"/>
-                        </p:cond>
+                        <p:cond delay="0"/>
                       </p:stCondLst>
                       <p:childTnLst>
                         <p:par>
-                          <p:cTn id="4" fill="hold" nodeType="afterGroup">
+                          <p:cTn id="4" fill="hold">
                             <p:stCondLst>
-                              <p:cond delay="0"/>
+                              <p:cond delay="30000"/>
                             </p:stCondLst>
                             <p:childTnLst>
                               <p:par>
-                                <p:cTn id="5" presetID="1" presetClass="entr" presetSubtype="0" fill="hold" grpId="0" nodeType="afterEffect">
+                                <p:cTn id="5" presetID="1" presetClass="entr" presetSubtype="0" fill="hold" grpId="0" nodeType="withEffect">
                                   <p:stCondLst>
-                                    <p:cond delay="40000"/>
+                                    <p:cond delay="0"/>
                                   </p:stCondLst>
                                   <p:childTnLst>
                                     <p:set>
@@ -20573,24 +20528,21 @@
               <p:cTn id="2" dur="indefinite" nodeType="mainSeq">
                 <p:childTnLst>
                   <p:par>
-                    <p:cTn id="3" fill="hold" nodeType="clickPar">
+                    <p:cTn id="3" fill="hold">
                       <p:stCondLst>
-                        <p:cond delay="indefinite"/>
-                        <p:cond evt="onBegin" delay="0">
-                          <p:tn val="2"/>
-                        </p:cond>
+                        <p:cond delay="0"/>
                       </p:stCondLst>
                       <p:childTnLst>
                         <p:par>
-                          <p:cTn id="4" fill="hold" nodeType="afterGroup">
+                          <p:cTn id="4" fill="hold">
                             <p:stCondLst>
-                              <p:cond delay="0"/>
+                              <p:cond delay="30000"/>
                             </p:stCondLst>
                             <p:childTnLst>
                               <p:par>
-                                <p:cTn id="5" presetID="1" presetClass="entr" presetSubtype="0" fill="hold" grpId="0" nodeType="afterEffect">
+                                <p:cTn id="5" presetID="1" presetClass="entr" presetSubtype="0" fill="hold" grpId="0" nodeType="withEffect">
                                   <p:stCondLst>
-                                    <p:cond delay="40000"/>
+                                    <p:cond delay="0"/>
                                   </p:stCondLst>
                                   <p:childTnLst>
                                     <p:set>
@@ -21283,24 +21235,21 @@
               <p:cTn id="2" dur="indefinite" nodeType="mainSeq">
                 <p:childTnLst>
                   <p:par>
-                    <p:cTn id="3" fill="hold" nodeType="clickPar">
+                    <p:cTn id="3" fill="hold">
                       <p:stCondLst>
-                        <p:cond delay="indefinite"/>
-                        <p:cond evt="onBegin" delay="0">
-                          <p:tn val="2"/>
-                        </p:cond>
+                        <p:cond delay="0"/>
                       </p:stCondLst>
                       <p:childTnLst>
                         <p:par>
-                          <p:cTn id="4" fill="hold" nodeType="afterGroup">
+                          <p:cTn id="4" fill="hold">
                             <p:stCondLst>
-                              <p:cond delay="0"/>
+                              <p:cond delay="30000"/>
                             </p:stCondLst>
                             <p:childTnLst>
                               <p:par>
-                                <p:cTn id="5" presetID="1" presetClass="entr" presetSubtype="0" fill="hold" grpId="0" nodeType="afterEffect">
+                                <p:cTn id="5" presetID="1" presetClass="entr" presetSubtype="0" fill="hold" grpId="0" nodeType="withEffect">
                                   <p:stCondLst>
-                                    <p:cond delay="40000"/>
+                                    <p:cond delay="0"/>
                                   </p:stCondLst>
                                   <p:childTnLst>
                                     <p:set>
@@ -21993,24 +21942,21 @@
               <p:cTn id="2" dur="indefinite" nodeType="mainSeq">
                 <p:childTnLst>
                   <p:par>
-                    <p:cTn id="3" fill="hold" nodeType="clickPar">
+                    <p:cTn id="3" fill="hold">
                       <p:stCondLst>
-                        <p:cond delay="indefinite"/>
-                        <p:cond evt="onBegin" delay="0">
-                          <p:tn val="2"/>
-                        </p:cond>
+                        <p:cond delay="0"/>
                       </p:stCondLst>
                       <p:childTnLst>
                         <p:par>
-                          <p:cTn id="4" fill="hold" nodeType="afterGroup">
+                          <p:cTn id="4" fill="hold">
                             <p:stCondLst>
-                              <p:cond delay="0"/>
+                              <p:cond delay="30000"/>
                             </p:stCondLst>
                             <p:childTnLst>
                               <p:par>
-                                <p:cTn id="5" presetID="1" presetClass="entr" presetSubtype="0" fill="hold" grpId="0" nodeType="afterEffect">
+                                <p:cTn id="5" presetID="1" presetClass="entr" presetSubtype="0" fill="hold" grpId="0" nodeType="withEffect">
                                   <p:stCondLst>
-                                    <p:cond delay="40000"/>
+                                    <p:cond delay="0"/>
                                   </p:stCondLst>
                                   <p:childTnLst>
                                     <p:set>
@@ -22851,24 +22797,21 @@
               <p:cTn id="2" dur="indefinite" nodeType="mainSeq">
                 <p:childTnLst>
                   <p:par>
-                    <p:cTn id="3" fill="hold" nodeType="clickPar">
+                    <p:cTn id="3" fill="hold">
                       <p:stCondLst>
-                        <p:cond delay="indefinite"/>
-                        <p:cond evt="onBegin" delay="0">
-                          <p:tn val="2"/>
-                        </p:cond>
+                        <p:cond delay="0"/>
                       </p:stCondLst>
                       <p:childTnLst>
                         <p:par>
-                          <p:cTn id="4" fill="hold" nodeType="afterGroup">
+                          <p:cTn id="4" fill="hold">
                             <p:stCondLst>
-                              <p:cond delay="0"/>
+                              <p:cond delay="30000"/>
                             </p:stCondLst>
                             <p:childTnLst>
                               <p:par>
-                                <p:cTn id="5" presetID="1" presetClass="entr" presetSubtype="0" fill="hold" grpId="0" nodeType="afterEffect">
+                                <p:cTn id="5" presetID="1" presetClass="entr" presetSubtype="0" fill="hold" grpId="0" nodeType="withEffect">
                                   <p:stCondLst>
-                                    <p:cond delay="40000"/>
+                                    <p:cond delay="0"/>
                                   </p:stCondLst>
                                   <p:childTnLst>
                                     <p:set>
@@ -23930,24 +23873,21 @@
               <p:cTn id="2" dur="indefinite" nodeType="mainSeq">
                 <p:childTnLst>
                   <p:par>
-                    <p:cTn id="3" fill="hold" nodeType="clickPar">
+                    <p:cTn id="3" fill="hold">
                       <p:stCondLst>
-                        <p:cond delay="indefinite"/>
-                        <p:cond evt="onBegin" delay="0">
-                          <p:tn val="2"/>
-                        </p:cond>
+                        <p:cond delay="0"/>
                       </p:stCondLst>
                       <p:childTnLst>
                         <p:par>
-                          <p:cTn id="4" fill="hold" nodeType="afterGroup">
+                          <p:cTn id="4" fill="hold">
                             <p:stCondLst>
-                              <p:cond delay="0"/>
+                              <p:cond delay="30000"/>
                             </p:stCondLst>
                             <p:childTnLst>
                               <p:par>
-                                <p:cTn id="5" presetID="1" presetClass="entr" presetSubtype="0" fill="hold" grpId="0" nodeType="afterEffect">
+                                <p:cTn id="5" presetID="1" presetClass="entr" presetSubtype="0" fill="hold" grpId="0" nodeType="withEffect">
                                   <p:stCondLst>
-                                    <p:cond delay="40000"/>
+                                    <p:cond delay="0"/>
                                   </p:stCondLst>
                                   <p:childTnLst>
                                     <p:set>
@@ -24696,24 +24636,21 @@
               <p:cTn id="2" dur="indefinite" nodeType="mainSeq">
                 <p:childTnLst>
                   <p:par>
-                    <p:cTn id="3" fill="hold" nodeType="clickPar">
+                    <p:cTn id="3" fill="hold">
                       <p:stCondLst>
-                        <p:cond delay="indefinite"/>
-                        <p:cond evt="onBegin" delay="0">
-                          <p:tn val="2"/>
-                        </p:cond>
+                        <p:cond delay="0"/>
                       </p:stCondLst>
                       <p:childTnLst>
                         <p:par>
-                          <p:cTn id="4" fill="hold" nodeType="afterGroup">
+                          <p:cTn id="4" fill="hold">
                             <p:stCondLst>
-                              <p:cond delay="0"/>
+                              <p:cond delay="30000"/>
                             </p:stCondLst>
                             <p:childTnLst>
                               <p:par>
-                                <p:cTn id="5" presetID="1" presetClass="entr" presetSubtype="0" fill="hold" grpId="0" nodeType="afterEffect">
+                                <p:cTn id="5" presetID="1" presetClass="entr" presetSubtype="0" fill="hold" grpId="0" nodeType="withEffect">
                                   <p:stCondLst>
-                                    <p:cond delay="40000"/>
+                                    <p:cond delay="0"/>
                                   </p:stCondLst>
                                   <p:childTnLst>
                                     <p:set>
@@ -25745,24 +25682,21 @@
               <p:cTn id="2" dur="indefinite" nodeType="mainSeq">
                 <p:childTnLst>
                   <p:par>
-                    <p:cTn id="3" fill="hold" nodeType="clickPar">
+                    <p:cTn id="3" fill="hold">
                       <p:stCondLst>
-                        <p:cond delay="indefinite"/>
-                        <p:cond evt="onBegin" delay="0">
-                          <p:tn val="2"/>
-                        </p:cond>
+                        <p:cond delay="0"/>
                       </p:stCondLst>
                       <p:childTnLst>
                         <p:par>
-                          <p:cTn id="4" fill="hold" nodeType="afterGroup">
+                          <p:cTn id="4" fill="hold">
                             <p:stCondLst>
-                              <p:cond delay="0"/>
+                              <p:cond delay="30000"/>
                             </p:stCondLst>
                             <p:childTnLst>
                               <p:par>
-                                <p:cTn id="5" presetID="1" presetClass="entr" presetSubtype="0" fill="hold" grpId="0" nodeType="afterEffect">
+                                <p:cTn id="5" presetID="1" presetClass="entr" presetSubtype="0" fill="hold" grpId="0" nodeType="withEffect">
                                   <p:stCondLst>
-                                    <p:cond delay="40000"/>
+                                    <p:cond delay="0"/>
                                   </p:stCondLst>
                                   <p:childTnLst>
                                     <p:set>
@@ -26460,24 +26394,21 @@
               <p:cTn id="2" dur="indefinite" nodeType="mainSeq">
                 <p:childTnLst>
                   <p:par>
-                    <p:cTn id="3" fill="hold" nodeType="clickPar">
+                    <p:cTn id="3" fill="hold">
                       <p:stCondLst>
-                        <p:cond delay="indefinite"/>
-                        <p:cond evt="onBegin" delay="0">
-                          <p:tn val="2"/>
-                        </p:cond>
+                        <p:cond delay="0"/>
                       </p:stCondLst>
                       <p:childTnLst>
                         <p:par>
-                          <p:cTn id="4" fill="hold" nodeType="afterGroup">
+                          <p:cTn id="4" fill="hold">
                             <p:stCondLst>
-                              <p:cond delay="0"/>
+                              <p:cond delay="30000"/>
                             </p:stCondLst>
                             <p:childTnLst>
                               <p:par>
-                                <p:cTn id="5" presetID="1" presetClass="entr" presetSubtype="0" fill="hold" grpId="0" nodeType="afterEffect">
+                                <p:cTn id="5" presetID="1" presetClass="entr" presetSubtype="0" fill="hold" grpId="0" nodeType="withEffect">
                                   <p:stCondLst>
-                                    <p:cond delay="40000"/>
+                                    <p:cond delay="0"/>
                                   </p:stCondLst>
                                   <p:childTnLst>
                                     <p:set>
@@ -27226,24 +27157,21 @@
               <p:cTn id="2" dur="indefinite" nodeType="mainSeq">
                 <p:childTnLst>
                   <p:par>
-                    <p:cTn id="3" fill="hold" nodeType="clickPar">
+                    <p:cTn id="3" fill="hold">
                       <p:stCondLst>
-                        <p:cond delay="indefinite"/>
-                        <p:cond evt="onBegin" delay="0">
-                          <p:tn val="2"/>
-                        </p:cond>
+                        <p:cond delay="0"/>
                       </p:stCondLst>
                       <p:childTnLst>
                         <p:par>
-                          <p:cTn id="4" fill="hold" nodeType="afterGroup">
+                          <p:cTn id="4" fill="hold">
                             <p:stCondLst>
-                              <p:cond delay="0"/>
+                              <p:cond delay="30000"/>
                             </p:stCondLst>
                             <p:childTnLst>
                               <p:par>
-                                <p:cTn id="5" presetID="1" presetClass="entr" presetSubtype="0" fill="hold" grpId="0" nodeType="afterEffect">
+                                <p:cTn id="5" presetID="1" presetClass="entr" presetSubtype="0" fill="hold" grpId="0" nodeType="withEffect">
                                   <p:stCondLst>
-                                    <p:cond delay="40000"/>
+                                    <p:cond delay="0"/>
                                   </p:stCondLst>
                                   <p:childTnLst>
                                     <p:set>
@@ -28124,24 +28052,21 @@
               <p:cTn id="2" dur="indefinite" nodeType="mainSeq">
                 <p:childTnLst>
                   <p:par>
-                    <p:cTn id="3" fill="hold" nodeType="clickPar">
+                    <p:cTn id="3" fill="hold">
                       <p:stCondLst>
-                        <p:cond delay="indefinite"/>
-                        <p:cond evt="onBegin" delay="0">
-                          <p:tn val="2"/>
-                        </p:cond>
+                        <p:cond delay="0"/>
                       </p:stCondLst>
                       <p:childTnLst>
                         <p:par>
-                          <p:cTn id="4" fill="hold" nodeType="afterGroup">
+                          <p:cTn id="4" fill="hold">
                             <p:stCondLst>
-                              <p:cond delay="0"/>
+                              <p:cond delay="30000"/>
                             </p:stCondLst>
                             <p:childTnLst>
                               <p:par>
-                                <p:cTn id="5" presetID="1" presetClass="entr" presetSubtype="0" fill="hold" grpId="0" nodeType="afterEffect">
+                                <p:cTn id="5" presetID="1" presetClass="entr" presetSubtype="0" fill="hold" grpId="0" nodeType="withEffect">
                                   <p:stCondLst>
-                                    <p:cond delay="40000"/>
+                                    <p:cond delay="0"/>
                                   </p:stCondLst>
                                   <p:childTnLst>
                                     <p:set>
